--- a/lecons/F5/11_F5_M1_L10_Impact_of_Road_and_Railway_Transport_on_the_Economy.pptx
+++ b/lecons/F5/11_F5_M1_L10_Impact_of_Road_and_Railway_Transport_on_the_Economy.pptx
@@ -13167,7 +13167,7 @@
         <p:spPr>
           <a:xfrm>
             <a:off x="0" y="658368"/>
-            <a:ext cx="3840480" cy="5833872"/>
+            <a:ext cx="5120640" cy="5833872"/>
           </a:xfrm>
           <a:prstGeom prst="rect">
             <a:avLst/>
@@ -13182,8 +13182,8 @@
         </p:nvSpPr>
         <p:spPr>
           <a:xfrm>
-            <a:off x="4069080" y="1005840"/>
-            <a:ext cx="7802575" cy="731520"/>
+            <a:off x="5349240" y="1005840"/>
+            <a:ext cx="6522415" cy="731520"/>
           </a:xfrm>
           <a:prstGeom prst="rect">
             <a:avLst/>
@@ -13223,8 +13223,8 @@
         </p:nvSpPr>
         <p:spPr>
           <a:xfrm>
-            <a:off x="4069080" y="1783080"/>
-            <a:ext cx="7802575" cy="4663440"/>
+            <a:off x="5349240" y="1783080"/>
+            <a:ext cx="6522415" cy="4663440"/>
           </a:xfrm>
           <a:prstGeom prst="rect">
             <a:avLst/>
@@ -13243,7 +13243,7 @@
               <a:buNone/>
             </a:pPr>
             <a:r>
-              <a:rPr lang="en-US" sz="4000" b="1" dirty="0">
+              <a:rPr lang="en-US" sz="3200" b="1" dirty="0">
                 <a:solidFill>
                   <a:srgbClr val="111111"/>
                 </a:solidFill>
@@ -13253,7 +13253,7 @@
               </a:rPr>
               <a:t>Topic: Managing Resources for Development through Economic Activities</a:t>
             </a:r>
-            <a:endParaRPr lang="en-US" sz="4000" dirty="0"/>
+            <a:endParaRPr lang="en-US" sz="3200" dirty="0"/>
           </a:p>
           <a:p>
             <a:pPr algn="l" indent="0" marL="0">
@@ -13263,7 +13263,7 @@
               <a:buNone/>
             </a:pPr>
             <a:r>
-              <a:rPr lang="en-US" sz="4000" b="1" dirty="0">
+              <a:rPr lang="en-US" sz="3200" b="1" dirty="0">
                 <a:solidFill>
                   <a:srgbClr val="111111"/>
                 </a:solidFill>
@@ -13273,7 +13273,7 @@
               </a:rPr>
               <a:t>Sub-topic: World Communication</a:t>
             </a:r>
-            <a:endParaRPr lang="en-US" sz="4000" dirty="0"/>
+            <a:endParaRPr lang="en-US" sz="3200" dirty="0"/>
           </a:p>
           <a:p>
             <a:pPr algn="l" indent="0" marL="0">
@@ -13283,7 +13283,7 @@
               <a:buNone/>
             </a:pPr>
             <a:r>
-              <a:rPr lang="en-US" sz="4000" b="1" dirty="0">
+              <a:rPr lang="en-US" sz="3200" b="1" dirty="0">
                 <a:solidFill>
                   <a:srgbClr val="990011"/>
                 </a:solidFill>
@@ -13293,7 +13293,7 @@
               </a:rPr>
               <a:t>Lesson 10: Impact of Road and Railway Transport on the Economy</a:t>
             </a:r>
-            <a:endParaRPr lang="en-US" sz="4000" dirty="0"/>
+            <a:endParaRPr lang="en-US" sz="3200" dirty="0"/>
           </a:p>
         </p:txBody>
       </p:sp>

--- a/lecons/F5/11_F5_M1_L10_Impact_of_Road_and_Railway_Transport_on_the_Economy.pptx
+++ b/lecons/F5/11_F5_M1_L10_Impact_of_Road_and_Railway_Transport_on_the_Economy.pptx
@@ -56,9 +56,11 @@
     <p:sldId id="304" r:id="rId50"/>
     <p:sldId id="305" r:id="rId51"/>
     <p:sldId id="306" r:id="rId52"/>
+    <p:sldId id="307" r:id="rId53"/>
+    <p:sldId id="308" r:id="rId54"/>
   </p:sldIdLst>
   <p:notesMasterIdLst>
-    <p:notesMasterId r:id="rId53"/>
+    <p:notesMasterId r:id="rId55"/>
   </p:notesMasterIdLst>
   <p:sldSz cx="12192000" cy="6858000"/>
   <p:notesSz cx="6858000" cy="12192000"/>
@@ -3016,7 +3018,7 @@
           <a:p>
             <a:r>
               <a:rPr lang="en-US" dirty="0"/>
-              <a:t>Let us copy Impact of Road and Rail Transport on the Economy. Road and rail transport affect the economy as follows. On this slide we have Trade and Opening up of areas. Write each point on a new line, with the key term first, and explain it in your own words when we revise. When you finish, we go to the next slide.</a:t>
+              <a:t>Let us copy Positive Impacts. Road and rail transport have the following positive impacts on the economy. On this slide we have Trade and Opening up of areas. Write each point on a new line, with the key term first, and explain it in your own words when we revise. When you finish, we go to the next slide.</a:t>
             </a:r>
             <a:endParaRPr lang="en-US" dirty="0"/>
           </a:p>
@@ -3104,7 +3106,7 @@
           <a:p>
             <a:r>
               <a:rPr lang="en-US" dirty="0"/>
-              <a:t>We continue with Impact of Road and Rail Transport on the Economy. On this slide we have Employment and Negative effects. Write each point on a new line, with the key term first, and explain it in your own words when we revise.</a:t>
+              <a:t>We continue with Positive Impacts. On this slide we have Employment. Write each point on a new line, with the key term first, and explain it in your own words when we revise.</a:t>
             </a:r>
             <a:endParaRPr lang="en-US" dirty="0"/>
           </a:p>
@@ -3192,7 +3194,7 @@
           <a:p>
             <a:r>
               <a:rPr lang="en-US" dirty="0"/>
-              <a:t>Let us copy Recent Developments in Road and Rail Transport. Recent developments include the following. On this slide we have Motorways and flyovers and Viaducts. Write each point on a new line, with the key term first, and explain it in your own words when we revise. When you finish, we go to the next slide.</a:t>
+              <a:t>Let us copy Negative Impacts. Road and rail transport have the following negative impacts. On this slide we have Accidents and Pollution. Write each point on a new line, with the key term first, and explain it in your own words when we revise. When you finish, we go to the next slide.</a:t>
             </a:r>
             <a:endParaRPr lang="en-US" dirty="0"/>
           </a:p>
@@ -3280,7 +3282,7 @@
           <a:p>
             <a:r>
               <a:rPr lang="en-US" dirty="0"/>
-              <a:t>We continue with Recent Developments in Road and Rail Transport. On this slide we have Electric and autonomous vehicles and Tramways and high-speed trains. Write each point on a new line, with the key term first, and explain it in your own words when we revise.</a:t>
+              <a:t>We continue with Negative Impacts. On this slide we have High maintenance costs. Write each point on a new line, with the key term first, and explain it in your own words when we revise.</a:t>
             </a:r>
             <a:endParaRPr lang="en-US" dirty="0"/>
           </a:p>
@@ -3368,7 +3370,7 @@
           <a:p>
             <a:r>
               <a:rPr lang="en-US" dirty="0"/>
-              <a:t>Now draw this illustration in your notebook: a transport network. Give it a title and label it clearly.</a:t>
+              <a:t>Let us copy Recent Developments in Road and Rail Transport. Recent developments include the following. On this slide we have Motorways and flyovers and Viaducts. Write each point on a new line, with the key term first, and explain it in your own words when we revise. When you finish, we go to the next slide.</a:t>
             </a:r>
             <a:endParaRPr lang="en-US" dirty="0"/>
           </a:p>
@@ -3544,7 +3546,7 @@
           <a:p>
             <a:r>
               <a:rPr lang="en-US" dirty="0"/>
-              <a:t>Now let us check what you have understood. Question 1: Give two positive effects of transport on the economy. Answer in your exercise book.</a:t>
+              <a:t>We continue with Recent Developments in Road and Rail Transport. On this slide we have Electric and autonomous vehicles and Tramways and high-speed trains. Write each point on a new line, with the key term first, and explain it in your own words when we revise.</a:t>
             </a:r>
             <a:endParaRPr lang="en-US" dirty="0"/>
           </a:p>
@@ -3632,7 +3634,7 @@
           <a:p>
             <a:r>
               <a:rPr lang="en-US" dirty="0"/>
-              <a:t>The expected answer is: it makes trade easier and creates jobs. If you got it right, well done.</a:t>
+              <a:t>Now draw this illustration in your notebook: a transport network. Give it a title and label it clearly.</a:t>
             </a:r>
             <a:endParaRPr lang="en-US" dirty="0"/>
           </a:p>
@@ -3720,7 +3722,7 @@
           <a:p>
             <a:r>
               <a:rPr lang="en-US" dirty="0"/>
-              <a:t>Now let us check what you have understood. Question 2: Name two recent developments in road or rail transport. Answer in your exercise book.</a:t>
+              <a:t>Now let us check what you have understood. Question 1: Give two positive effects of transport on the economy. Answer in your exercise book.</a:t>
             </a:r>
             <a:endParaRPr lang="en-US" dirty="0"/>
           </a:p>
@@ -3808,7 +3810,7 @@
           <a:p>
             <a:r>
               <a:rPr lang="en-US" dirty="0"/>
-              <a:t>The expected answer is: electric cars and tramways. If you got it right, well done.</a:t>
+              <a:t>The expected answer is: it makes trade easier and creates jobs. If you got it right, well done.</a:t>
             </a:r>
             <a:endParaRPr lang="en-US" dirty="0"/>
           </a:p>
@@ -3896,7 +3898,7 @@
           <a:p>
             <a:r>
               <a:rPr lang="en-US" dirty="0"/>
-              <a:t>For those who need more practice, fill in the blanks in your exercise book. The answers are: number 1, flyover; number 2, viaduct; number 3, autonomous.</a:t>
+              <a:t>Now let us check what you have understood. Question 2: Name two recent developments in road or rail transport. Answer in your exercise book.</a:t>
             </a:r>
             <a:endParaRPr lang="en-US" dirty="0"/>
           </a:p>
@@ -3984,7 +3986,7 @@
           <a:p>
             <a:r>
               <a:rPr lang="en-US" dirty="0"/>
-              <a:t>For your homework: Explain how the tarring of a road in your region changed the life of the people. We shall correct it at the beginning of our next lesson.</a:t>
+              <a:t>The expected answer is: electric cars and tramways. If you got it right, well done.</a:t>
             </a:r>
             <a:endParaRPr lang="en-US" dirty="0"/>
           </a:p>
@@ -4072,7 +4074,7 @@
           <a:p>
             <a:r>
               <a:rPr lang="en-US" dirty="0"/>
-              <a:t>Our next lesson will be on Lesson 11: Air and Water Transport. Thank you for your attention, and see you next time.</a:t>
+              <a:t>For those who need more practice, fill in the blanks in your exercise book. The answers are: number 1, flyover; number 2, viaduct; number 3, autonomous.</a:t>
             </a:r>
             <a:endParaRPr lang="en-US" dirty="0"/>
           </a:p>
@@ -4160,7 +4162,7 @@
           <a:p>
             <a:r>
               <a:rPr lang="en-US" dirty="0"/>
-              <a:t>Let us play the bilingual game. I say a word in English, and you give me the French word. Then we do the reverse.</a:t>
+              <a:t>For your homework: Explain how the tarring of a road in your region changed the life of the people. We shall correct it at the beginning of our next lesson.</a:t>
             </a:r>
             <a:endParaRPr lang="en-US" dirty="0"/>
           </a:p>
@@ -4248,7 +4250,7 @@
           <a:p>
             <a:r>
               <a:rPr lang="en-US" dirty="0"/>
-              <a:t>I record this information in the official logbook of the class after the lesson.</a:t>
+              <a:t>Our next lesson will be on Lesson 11: Air and Water Transport. Thank you for your attention, and see you next time.</a:t>
             </a:r>
             <a:endParaRPr lang="en-US" dirty="0"/>
           </a:p>
@@ -4336,7 +4338,7 @@
           <a:p>
             <a:r>
               <a:rPr lang="en-US" dirty="0"/>
-              <a:t>I complete the second page of the logbook: the matter taught, the evaluation, the homework and the attendance.</a:t>
+              <a:t>Let us play the bilingual game. I say a word in English, and you give me the French word. Then we do the reverse.</a:t>
             </a:r>
             <a:endParaRPr lang="en-US" dirty="0"/>
           </a:p>
@@ -4512,7 +4514,7 @@
           <a:p>
             <a:r>
               <a:rPr lang="en-US" dirty="0"/>
-              <a:t>This slide is for me, the teacher: it gives the timing of the lesson and what to do if the projector is not available.</a:t>
+              <a:t>I record this information in the official logbook of the class after the lesson.</a:t>
             </a:r>
             <a:endParaRPr lang="en-US" dirty="0"/>
           </a:p>
@@ -4600,7 +4602,7 @@
           <a:p>
             <a:r>
               <a:rPr lang="en-US" dirty="0"/>
-              <a:t>These are the references and picture credits used to prepare this lesson.</a:t>
+              <a:t>I complete the second page of the logbook: the matter taught, the evaluation, the homework and the attendance.</a:t>
             </a:r>
             <a:endParaRPr lang="en-US" dirty="0"/>
           </a:p>
@@ -4624,6 +4626,182 @@
             <a:fld id="{F7021451-1387-4CA6-816F-3879F97B5CBC}" type="slidenum">
               <a:rPr lang="en-US"/>
               <a:t>51</a:t>
+            </a:fld>
+            <a:endParaRPr lang="en-US"/>
+          </a:p>
+        </p:txBody>
+      </p:sp>
+    </p:spTree>
+    <p:extLst>
+      <p:ext uri="{BB962C8B-B14F-4D97-AF65-F5344CB8AC3E}">
+        <p14:creationId xmlns:p14="http://schemas.microsoft.com/office/powerpoint/2010/main" val="1024086991"/>
+      </p:ext>
+    </p:extLst>
+  </p:cSld>
+  <p:clrMapOvr>
+    <a:masterClrMapping/>
+  </p:clrMapOvr>
+</p:notes>
+</file>
+
+<file path=ppt/notesSlides/notesSlide52.xml><?xml version="1.0" encoding="utf-8"?>
+<p:notes xmlns:a="http://schemas.openxmlformats.org/drawingml/2006/main" xmlns:r="http://schemas.openxmlformats.org/officeDocument/2006/relationships" xmlns:p="http://schemas.openxmlformats.org/presentationml/2006/main">
+  <p:cSld>
+    <p:spTree>
+      <p:nvGrpSpPr>
+        <p:cNvPr id="1" name=""/>
+        <p:cNvGrpSpPr/>
+        <p:nvPr/>
+      </p:nvGrpSpPr>
+      <p:grpSpPr>
+        <a:xfrm>
+          <a:off x="0" y="0"/>
+          <a:ext cx="0" cy="0"/>
+          <a:chOff x="0" y="0"/>
+          <a:chExt cx="0" cy="0"/>
+        </a:xfrm>
+      </p:grpSpPr>
+      <p:sp>
+        <p:nvSpPr>
+          <p:cNvPr id="2" name="Slide Image Placeholder 1"/>
+          <p:cNvSpPr>
+            <a:spLocks noGrp="1" noRot="1" noChangeAspect="1"/>
+          </p:cNvSpPr>
+          <p:nvPr>
+            <p:ph type="sldImg"/>
+          </p:nvPr>
+        </p:nvSpPr>
+        <p:spPr/>
+      </p:sp>
+      <p:sp>
+        <p:nvSpPr>
+          <p:cNvPr id="3" name="Notes Placeholder 2"/>
+          <p:cNvSpPr>
+            <a:spLocks noGrp="1"/>
+          </p:cNvSpPr>
+          <p:nvPr>
+            <p:ph type="body" idx="1"/>
+          </p:nvPr>
+        </p:nvSpPr>
+        <p:spPr/>
+        <p:txBody>
+          <a:bodyPr/>
+          <a:lstStyle/>
+          <a:p>
+            <a:r>
+              <a:rPr lang="en-US" dirty="0"/>
+              <a:t>This slide is for me, the teacher: it gives the timing of the lesson and what to do if the projector is not available.</a:t>
+            </a:r>
+            <a:endParaRPr lang="en-US" dirty="0"/>
+          </a:p>
+        </p:txBody>
+      </p:sp>
+      <p:sp>
+        <p:nvSpPr>
+          <p:cNvPr id="4" name="Slide Number Placeholder 3"/>
+          <p:cNvSpPr>
+            <a:spLocks noGrp="1"/>
+          </p:cNvSpPr>
+          <p:nvPr>
+            <p:ph type="sldNum" sz="quarter" idx="10"/>
+          </p:nvPr>
+        </p:nvSpPr>
+        <p:spPr/>
+        <p:txBody>
+          <a:bodyPr/>
+          <a:lstStyle/>
+          <a:p>
+            <a:fld id="{F7021451-1387-4CA6-816F-3879F97B5CBC}" type="slidenum">
+              <a:rPr lang="en-US"/>
+              <a:t>52</a:t>
+            </a:fld>
+            <a:endParaRPr lang="en-US"/>
+          </a:p>
+        </p:txBody>
+      </p:sp>
+    </p:spTree>
+    <p:extLst>
+      <p:ext uri="{BB962C8B-B14F-4D97-AF65-F5344CB8AC3E}">
+        <p14:creationId xmlns:p14="http://schemas.microsoft.com/office/powerpoint/2010/main" val="1024086991"/>
+      </p:ext>
+    </p:extLst>
+  </p:cSld>
+  <p:clrMapOvr>
+    <a:masterClrMapping/>
+  </p:clrMapOvr>
+</p:notes>
+</file>
+
+<file path=ppt/notesSlides/notesSlide53.xml><?xml version="1.0" encoding="utf-8"?>
+<p:notes xmlns:a="http://schemas.openxmlformats.org/drawingml/2006/main" xmlns:r="http://schemas.openxmlformats.org/officeDocument/2006/relationships" xmlns:p="http://schemas.openxmlformats.org/presentationml/2006/main">
+  <p:cSld>
+    <p:spTree>
+      <p:nvGrpSpPr>
+        <p:cNvPr id="1" name=""/>
+        <p:cNvGrpSpPr/>
+        <p:nvPr/>
+      </p:nvGrpSpPr>
+      <p:grpSpPr>
+        <a:xfrm>
+          <a:off x="0" y="0"/>
+          <a:ext cx="0" cy="0"/>
+          <a:chOff x="0" y="0"/>
+          <a:chExt cx="0" cy="0"/>
+        </a:xfrm>
+      </p:grpSpPr>
+      <p:sp>
+        <p:nvSpPr>
+          <p:cNvPr id="2" name="Slide Image Placeholder 1"/>
+          <p:cNvSpPr>
+            <a:spLocks noGrp="1" noRot="1" noChangeAspect="1"/>
+          </p:cNvSpPr>
+          <p:nvPr>
+            <p:ph type="sldImg"/>
+          </p:nvPr>
+        </p:nvSpPr>
+        <p:spPr/>
+      </p:sp>
+      <p:sp>
+        <p:nvSpPr>
+          <p:cNvPr id="3" name="Notes Placeholder 2"/>
+          <p:cNvSpPr>
+            <a:spLocks noGrp="1"/>
+          </p:cNvSpPr>
+          <p:nvPr>
+            <p:ph type="body" idx="1"/>
+          </p:nvPr>
+        </p:nvSpPr>
+        <p:spPr/>
+        <p:txBody>
+          <a:bodyPr/>
+          <a:lstStyle/>
+          <a:p>
+            <a:r>
+              <a:rPr lang="en-US" dirty="0"/>
+              <a:t>These are the references and picture credits used to prepare this lesson.</a:t>
+            </a:r>
+            <a:endParaRPr lang="en-US" dirty="0"/>
+          </a:p>
+        </p:txBody>
+      </p:sp>
+      <p:sp>
+        <p:nvSpPr>
+          <p:cNvPr id="4" name="Slide Number Placeholder 3"/>
+          <p:cNvSpPr>
+            <a:spLocks noGrp="1"/>
+          </p:cNvSpPr>
+          <p:nvPr>
+            <p:ph type="sldNum" sz="quarter" idx="10"/>
+          </p:nvPr>
+        </p:nvSpPr>
+        <p:spPr/>
+        <p:txBody>
+          <a:bodyPr/>
+          <a:lstStyle/>
+          <a:p>
+            <a:fld id="{F7021451-1387-4CA6-816F-3879F97B5CBC}" type="slidenum">
+              <a:rPr lang="en-US"/>
+              <a:t>53</a:t>
             </a:fld>
             <a:endParaRPr lang="en-US"/>
           </a:p>
@@ -13426,7 +13604,7 @@
         <p:spPr>
           <a:xfrm>
             <a:off x="0" y="658368"/>
-            <a:ext cx="3840480" cy="5833872"/>
+            <a:ext cx="1463040" cy="5833872"/>
           </a:xfrm>
           <a:prstGeom prst="rect">
             <a:avLst/>
@@ -13441,8 +13619,8 @@
         </p:nvSpPr>
         <p:spPr>
           <a:xfrm>
-            <a:off x="4069080" y="1005840"/>
-            <a:ext cx="7802575" cy="731520"/>
+            <a:off x="1691640" y="1005840"/>
+            <a:ext cx="10180015" cy="731520"/>
           </a:xfrm>
           <a:prstGeom prst="rect">
             <a:avLst/>
@@ -13482,8 +13660,47 @@
         </p:nvSpPr>
         <p:spPr>
           <a:xfrm>
-            <a:off x="4069080" y="1783080"/>
-            <a:ext cx="7802575" cy="4663440"/>
+            <a:off x="1691640" y="1737360"/>
+            <a:ext cx="10180015" cy="457200"/>
+          </a:xfrm>
+          <a:prstGeom prst="rect">
+            <a:avLst/>
+          </a:prstGeom>
+          <a:noFill/>
+          <a:ln/>
+        </p:spPr>
+        <p:txBody>
+          <a:bodyPr wrap="square" lIns="0" tIns="0" rIns="0" bIns="0" rtlCol="0" anchor="ctr"/>
+          <a:lstStyle/>
+          <a:p>
+            <a:pPr algn="l" indent="0" marL="0">
+              <a:buNone/>
+            </a:pPr>
+            <a:r>
+              <a:rPr lang="en-US" sz="3200" b="1" dirty="0">
+                <a:solidFill>
+                  <a:srgbClr val="990011"/>
+                </a:solidFill>
+                <a:latin typeface="Times New Roman" pitchFamily="34" charset="0"/>
+                <a:ea typeface="Times New Roman" pitchFamily="34" charset="-122"/>
+                <a:cs typeface="Times New Roman" pitchFamily="34" charset="-120"/>
+              </a:rPr>
+              <a:t>A) Positive Impacts</a:t>
+            </a:r>
+            <a:endParaRPr lang="en-US" sz="3200" dirty="0"/>
+          </a:p>
+        </p:txBody>
+      </p:sp>
+      <p:sp>
+        <p:nvSpPr>
+          <p:cNvPr id="6" name="Text 3"/>
+          <p:cNvSpPr/>
+          <p:nvPr/>
+        </p:nvSpPr>
+        <p:spPr>
+          <a:xfrm>
+            <a:off x="1691640" y="2240280"/>
+            <a:ext cx="10180015" cy="4206240"/>
           </a:xfrm>
           <a:prstGeom prst="rect">
             <a:avLst/>
@@ -13510,7 +13727,7 @@
                 <a:ea typeface="Times New Roman" pitchFamily="34" charset="-122"/>
                 <a:cs typeface="Times New Roman" pitchFamily="34" charset="-120"/>
               </a:rPr>
-              <a:t>Road and rail transport affect the economy as follows:</a:t>
+              <a:t>Road and rail transport have the following positive impacts on the economy:</a:t>
             </a:r>
             <a:endParaRPr lang="en-US" sz="4000" dirty="0"/>
           </a:p>
@@ -13761,7 +13978,7 @@
                 <a:ea typeface="Times New Roman" pitchFamily="34" charset="-122"/>
                 <a:cs typeface="Times New Roman" pitchFamily="34" charset="-120"/>
               </a:rPr>
-              <a:t>1. Impact of Road and Rail Transport on the Economy (continued)</a:t>
+              <a:t>1. Impact of Road and Rail Transport on the Economy</a:t>
             </a:r>
             <a:endParaRPr lang="en-US" sz="3600" dirty="0"/>
           </a:p>
@@ -13775,8 +13992,47 @@
         </p:nvSpPr>
         <p:spPr>
           <a:xfrm>
-            <a:off x="5349240" y="1783080"/>
-            <a:ext cx="6522415" cy="4663440"/>
+            <a:off x="5349240" y="1737360"/>
+            <a:ext cx="6522415" cy="457200"/>
+          </a:xfrm>
+          <a:prstGeom prst="rect">
+            <a:avLst/>
+          </a:prstGeom>
+          <a:noFill/>
+          <a:ln/>
+        </p:spPr>
+        <p:txBody>
+          <a:bodyPr wrap="square" lIns="0" tIns="0" rIns="0" bIns="0" rtlCol="0" anchor="ctr"/>
+          <a:lstStyle/>
+          <a:p>
+            <a:pPr algn="l" indent="0" marL="0">
+              <a:buNone/>
+            </a:pPr>
+            <a:r>
+              <a:rPr lang="en-US" sz="3200" b="1" dirty="0">
+                <a:solidFill>
+                  <a:srgbClr val="990011"/>
+                </a:solidFill>
+                <a:latin typeface="Times New Roman" pitchFamily="34" charset="0"/>
+                <a:ea typeface="Times New Roman" pitchFamily="34" charset="-122"/>
+                <a:cs typeface="Times New Roman" pitchFamily="34" charset="-120"/>
+              </a:rPr>
+              <a:t>A) Positive Impacts (continued)</a:t>
+            </a:r>
+            <a:endParaRPr lang="en-US" sz="3200" dirty="0"/>
+          </a:p>
+        </p:txBody>
+      </p:sp>
+      <p:sp>
+        <p:nvSpPr>
+          <p:cNvPr id="6" name="Text 3"/>
+          <p:cNvSpPr/>
+          <p:nvPr/>
+        </p:nvSpPr>
+        <p:spPr>
+          <a:xfrm>
+            <a:off x="5349240" y="2240280"/>
+            <a:ext cx="6522415" cy="4206240"/>
           </a:xfrm>
           <a:prstGeom prst="rect">
             <a:avLst/>
@@ -13821,43 +14077,6 @@
                 <a:cs typeface="Times New Roman" pitchFamily="34" charset="-120"/>
               </a:rPr>
               <a:t>They create jobs for drivers, mechanics and railway workers.</a:t>
-            </a:r>
-            <a:endParaRPr lang="en-US" sz="4000" dirty="0"/>
-          </a:p>
-          <a:p>
-            <a:pPr algn="l" indent="0" marL="0">
-              <a:spcAft>
-                <a:spcPts val="800"/>
-              </a:spcAft>
-              <a:buNone/>
-            </a:pPr>
-            <a:r>
-              <a:rPr lang="en-US" sz="4000" b="1" dirty="0">
-                <a:solidFill>
-                  <a:srgbClr val="111111"/>
-                </a:solidFill>
-                <a:latin typeface="Times New Roman" pitchFamily="34" charset="0"/>
-                <a:ea typeface="Times New Roman" pitchFamily="34" charset="-122"/>
-                <a:cs typeface="Times New Roman" pitchFamily="34" charset="-120"/>
-              </a:rPr>
-              <a:t>Negative effects: </a:t>
-            </a:r>
-            <a:pPr algn="l" indent="0" marL="0">
-              <a:spcAft>
-                <a:spcPts val="800"/>
-              </a:spcAft>
-              <a:buNone/>
-            </a:pPr>
-            <a:r>
-              <a:rPr lang="en-US" sz="4000" dirty="0">
-                <a:solidFill>
-                  <a:srgbClr val="111111"/>
-                </a:solidFill>
-                <a:latin typeface="Times New Roman" pitchFamily="34" charset="0"/>
-                <a:ea typeface="Times New Roman" pitchFamily="34" charset="-122"/>
-                <a:cs typeface="Times New Roman" pitchFamily="34" charset="-120"/>
-              </a:rPr>
-              <a:t>They cause accidents, pollution and high maintenance costs.</a:t>
             </a:r>
             <a:endParaRPr lang="en-US" sz="4000" dirty="0"/>
           </a:p>
@@ -14034,7 +14253,7 @@
                 <a:ea typeface="Times New Roman" pitchFamily="34" charset="-122"/>
                 <a:cs typeface="Times New Roman" pitchFamily="34" charset="-120"/>
               </a:rPr>
-              <a:t>2. Recent Developments in Road and Rail Transport</a:t>
+              <a:t>1. Impact of Road and Rail Transport on the Economy</a:t>
             </a:r>
             <a:endParaRPr lang="en-US" sz="3600" dirty="0"/>
           </a:p>
@@ -14048,8 +14267,47 @@
         </p:nvSpPr>
         <p:spPr>
           <a:xfrm>
-            <a:off x="4069080" y="1783080"/>
-            <a:ext cx="7802575" cy="4663440"/>
+            <a:off x="4069080" y="1737360"/>
+            <a:ext cx="7802575" cy="457200"/>
+          </a:xfrm>
+          <a:prstGeom prst="rect">
+            <a:avLst/>
+          </a:prstGeom>
+          <a:noFill/>
+          <a:ln/>
+        </p:spPr>
+        <p:txBody>
+          <a:bodyPr wrap="square" lIns="0" tIns="0" rIns="0" bIns="0" rtlCol="0" anchor="ctr"/>
+          <a:lstStyle/>
+          <a:p>
+            <a:pPr algn="l" indent="0" marL="0">
+              <a:buNone/>
+            </a:pPr>
+            <a:r>
+              <a:rPr lang="en-US" sz="3200" b="1" dirty="0">
+                <a:solidFill>
+                  <a:srgbClr val="990011"/>
+                </a:solidFill>
+                <a:latin typeface="Times New Roman" pitchFamily="34" charset="0"/>
+                <a:ea typeface="Times New Roman" pitchFamily="34" charset="-122"/>
+                <a:cs typeface="Times New Roman" pitchFamily="34" charset="-120"/>
+              </a:rPr>
+              <a:t>B) Negative Impacts</a:t>
+            </a:r>
+            <a:endParaRPr lang="en-US" sz="3200" dirty="0"/>
+          </a:p>
+        </p:txBody>
+      </p:sp>
+      <p:sp>
+        <p:nvSpPr>
+          <p:cNvPr id="6" name="Text 3"/>
+          <p:cNvSpPr/>
+          <p:nvPr/>
+        </p:nvSpPr>
+        <p:spPr>
+          <a:xfrm>
+            <a:off x="4069080" y="2240280"/>
+            <a:ext cx="7802575" cy="4206240"/>
           </a:xfrm>
           <a:prstGeom prst="rect">
             <a:avLst/>
@@ -14076,7 +14334,7 @@
                 <a:ea typeface="Times New Roman" pitchFamily="34" charset="-122"/>
                 <a:cs typeface="Times New Roman" pitchFamily="34" charset="-120"/>
               </a:rPr>
-              <a:t>Recent developments include the following:</a:t>
+              <a:t>Road and rail transport have the following negative impacts:</a:t>
             </a:r>
             <a:endParaRPr lang="en-US" sz="4000" dirty="0"/>
           </a:p>
@@ -14096,7 +14354,7 @@
                 <a:ea typeface="Times New Roman" pitchFamily="34" charset="-122"/>
                 <a:cs typeface="Times New Roman" pitchFamily="34" charset="-120"/>
               </a:rPr>
-              <a:t>Motorways and flyovers: </a:t>
+              <a:t>Accidents: </a:t>
             </a:r>
             <a:pPr algn="l" indent="0" marL="0">
               <a:spcAft>
@@ -14113,7 +14371,7 @@
                 <a:ea typeface="Times New Roman" pitchFamily="34" charset="-122"/>
                 <a:cs typeface="Times New Roman" pitchFamily="34" charset="-120"/>
               </a:rPr>
-              <a:t>Wide roads and bridges over roads make traffic faster.</a:t>
+              <a:t>They kill people and destroy goods.</a:t>
             </a:r>
             <a:endParaRPr lang="en-US" sz="4000" dirty="0"/>
           </a:p>
@@ -14133,7 +14391,7 @@
                 <a:ea typeface="Times New Roman" pitchFamily="34" charset="-122"/>
                 <a:cs typeface="Times New Roman" pitchFamily="34" charset="-120"/>
               </a:rPr>
-              <a:t>Viaducts: </a:t>
+              <a:t>Pollution: </a:t>
             </a:r>
             <a:pPr algn="l" indent="0" marL="0">
               <a:spcAft>
@@ -14150,7 +14408,7 @@
                 <a:ea typeface="Times New Roman" pitchFamily="34" charset="-122"/>
                 <a:cs typeface="Times New Roman" pitchFamily="34" charset="-120"/>
               </a:rPr>
-              <a:t>Long bridges carry roads and railways over valleys.</a:t>
+              <a:t>Vehicles and trains pollute the air.</a:t>
             </a:r>
             <a:endParaRPr lang="en-US" sz="4000" dirty="0"/>
           </a:p>
@@ -14285,7 +14543,7 @@
         <p:spPr>
           <a:xfrm>
             <a:off x="0" y="658368"/>
-            <a:ext cx="3840480" cy="5833872"/>
+            <a:ext cx="5120640" cy="5833872"/>
           </a:xfrm>
           <a:prstGeom prst="rect">
             <a:avLst/>
@@ -14300,8 +14558,8 @@
         </p:nvSpPr>
         <p:spPr>
           <a:xfrm>
-            <a:off x="4069080" y="1005840"/>
-            <a:ext cx="7802575" cy="731520"/>
+            <a:off x="5349240" y="1005840"/>
+            <a:ext cx="6522415" cy="731520"/>
           </a:xfrm>
           <a:prstGeom prst="rect">
             <a:avLst/>
@@ -14327,7 +14585,7 @@
                 <a:ea typeface="Times New Roman" pitchFamily="34" charset="-122"/>
                 <a:cs typeface="Times New Roman" pitchFamily="34" charset="-120"/>
               </a:rPr>
-              <a:t>2. Recent Developments in Road and Rail Transport (continued)</a:t>
+              <a:t>1. Impact of Road and Rail Transport on the Economy</a:t>
             </a:r>
             <a:endParaRPr lang="en-US" sz="3600" dirty="0"/>
           </a:p>
@@ -14341,8 +14599,47 @@
         </p:nvSpPr>
         <p:spPr>
           <a:xfrm>
-            <a:off x="4069080" y="1783080"/>
-            <a:ext cx="7802575" cy="4663440"/>
+            <a:off x="5349240" y="1737360"/>
+            <a:ext cx="6522415" cy="457200"/>
+          </a:xfrm>
+          <a:prstGeom prst="rect">
+            <a:avLst/>
+          </a:prstGeom>
+          <a:noFill/>
+          <a:ln/>
+        </p:spPr>
+        <p:txBody>
+          <a:bodyPr wrap="square" lIns="0" tIns="0" rIns="0" bIns="0" rtlCol="0" anchor="ctr"/>
+          <a:lstStyle/>
+          <a:p>
+            <a:pPr algn="l" indent="0" marL="0">
+              <a:buNone/>
+            </a:pPr>
+            <a:r>
+              <a:rPr lang="en-US" sz="3200" b="1" dirty="0">
+                <a:solidFill>
+                  <a:srgbClr val="990011"/>
+                </a:solidFill>
+                <a:latin typeface="Times New Roman" pitchFamily="34" charset="0"/>
+                <a:ea typeface="Times New Roman" pitchFamily="34" charset="-122"/>
+                <a:cs typeface="Times New Roman" pitchFamily="34" charset="-120"/>
+              </a:rPr>
+              <a:t>B) Negative Impacts (continued)</a:t>
+            </a:r>
+            <a:endParaRPr lang="en-US" sz="3200" dirty="0"/>
+          </a:p>
+        </p:txBody>
+      </p:sp>
+      <p:sp>
+        <p:nvSpPr>
+          <p:cNvPr id="6" name="Text 3"/>
+          <p:cNvSpPr/>
+          <p:nvPr/>
+        </p:nvSpPr>
+        <p:spPr>
+          <a:xfrm>
+            <a:off x="5349240" y="2240280"/>
+            <a:ext cx="6522415" cy="4206240"/>
           </a:xfrm>
           <a:prstGeom prst="rect">
             <a:avLst/>
@@ -14369,7 +14666,7 @@
                 <a:ea typeface="Times New Roman" pitchFamily="34" charset="-122"/>
                 <a:cs typeface="Times New Roman" pitchFamily="34" charset="-120"/>
               </a:rPr>
-              <a:t>Electric and autonomous vehicles: </a:t>
+              <a:t>High maintenance costs: </a:t>
             </a:r>
             <a:pPr algn="l" indent="0" marL="0">
               <a:spcAft>
@@ -14386,44 +14683,7 @@
                 <a:ea typeface="Times New Roman" pitchFamily="34" charset="-122"/>
                 <a:cs typeface="Times New Roman" pitchFamily="34" charset="-120"/>
               </a:rPr>
-              <a:t>New cars run on electricity or drive themselves.</a:t>
-            </a:r>
-            <a:endParaRPr lang="en-US" sz="4000" dirty="0"/>
-          </a:p>
-          <a:p>
-            <a:pPr algn="l" indent="0" marL="0">
-              <a:spcAft>
-                <a:spcPts val="800"/>
-              </a:spcAft>
-              <a:buNone/>
-            </a:pPr>
-            <a:r>
-              <a:rPr lang="en-US" sz="4000" b="1" dirty="0">
-                <a:solidFill>
-                  <a:srgbClr val="111111"/>
-                </a:solidFill>
-                <a:latin typeface="Times New Roman" pitchFamily="34" charset="0"/>
-                <a:ea typeface="Times New Roman" pitchFamily="34" charset="-122"/>
-                <a:cs typeface="Times New Roman" pitchFamily="34" charset="-120"/>
-              </a:rPr>
-              <a:t>Tramways and high-speed trains: </a:t>
-            </a:r>
-            <a:pPr algn="l" indent="0" marL="0">
-              <a:spcAft>
-                <a:spcPts val="800"/>
-              </a:spcAft>
-              <a:buNone/>
-            </a:pPr>
-            <a:r>
-              <a:rPr lang="en-US" sz="4000" dirty="0">
-                <a:solidFill>
-                  <a:srgbClr val="111111"/>
-                </a:solidFill>
-                <a:latin typeface="Times New Roman" pitchFamily="34" charset="0"/>
-                <a:ea typeface="Times New Roman" pitchFamily="34" charset="-122"/>
-                <a:cs typeface="Times New Roman" pitchFamily="34" charset="-120"/>
-              </a:rPr>
-              <a:t>They carry many passengers quickly in and between towns.</a:t>
+              <a:t>Roads and lines must be repaired often.</a:t>
             </a:r>
             <a:endParaRPr lang="en-US" sz="4000" dirty="0"/>
           </a:p>
@@ -14541,48 +14801,9 @@
           </a:p>
         </p:txBody>
       </p:sp>
-      <p:sp>
-        <p:nvSpPr>
-          <p:cNvPr id="3" name="Text 1"/>
-          <p:cNvSpPr/>
-          <p:nvPr/>
-        </p:nvSpPr>
-        <p:spPr>
-          <a:xfrm>
-            <a:off x="457200" y="1005840"/>
-            <a:ext cx="11277295" cy="731520"/>
-          </a:xfrm>
-          <a:prstGeom prst="rect">
-            <a:avLst/>
-          </a:prstGeom>
-          <a:noFill/>
-          <a:ln/>
-        </p:spPr>
-        <p:txBody>
-          <a:bodyPr wrap="square" lIns="0" tIns="0" rIns="0" bIns="0" rtlCol="0" anchor="ctr"/>
-          <a:lstStyle/>
-          <a:p>
-            <a:pPr algn="ctr" indent="0" marL="0">
-              <a:buNone/>
-            </a:pPr>
-            <a:r>
-              <a:rPr lang="en-US" sz="3600" b="1" dirty="0">
-                <a:solidFill>
-                  <a:srgbClr val="990011"/>
-                </a:solidFill>
-                <a:latin typeface="Times New Roman" pitchFamily="34" charset="0"/>
-                <a:ea typeface="Times New Roman" pitchFamily="34" charset="-122"/>
-                <a:cs typeface="Times New Roman" pitchFamily="34" charset="-120"/>
-              </a:rPr>
-              <a:t>2. Recent Developments in Road and Rail Transport</a:t>
-            </a:r>
-            <a:endParaRPr lang="en-US" sz="3600" dirty="0"/>
-          </a:p>
-        </p:txBody>
-      </p:sp>
       <p:pic>
         <p:nvPicPr>
-          <p:cNvPr id="4" name="Image 0" descr="/home/claude/f4/img/v2/network_terms_big.png">    </p:cNvPr>
+          <p:cNvPr id="3" name="Image 0" descr="/home/claude/f4/img/minesec_sheet.png">    </p:cNvPr>
           <p:cNvPicPr>
             <a:picLocks noChangeAspect="1"/>
           </p:cNvPicPr>
@@ -14596,8 +14817,8 @@
         </p:blipFill>
         <p:spPr>
           <a:xfrm>
-            <a:off x="629930" y="1783080"/>
-            <a:ext cx="10931835" cy="4270248"/>
+            <a:off x="0" y="658368"/>
+            <a:ext cx="3840480" cy="5833872"/>
           </a:xfrm>
           <a:prstGeom prst="rect">
             <a:avLst/>
@@ -14606,14 +14827,14 @@
       </p:pic>
       <p:sp>
         <p:nvSpPr>
-          <p:cNvPr id="5" name="Text 2"/>
+          <p:cNvPr id="4" name="Text 1"/>
           <p:cNvSpPr/>
           <p:nvPr/>
         </p:nvSpPr>
         <p:spPr>
           <a:xfrm>
-            <a:off x="457200" y="6089904"/>
-            <a:ext cx="11277295" cy="347472"/>
+            <a:off x="4069080" y="1005840"/>
+            <a:ext cx="7802575" cy="731520"/>
           </a:xfrm>
           <a:prstGeom prst="rect">
             <a:avLst/>
@@ -14622,24 +14843,142 @@
           <a:ln/>
         </p:spPr>
         <p:txBody>
-          <a:bodyPr wrap="square" lIns="0" tIns="0" rIns="0" bIns="0" rtlCol="0" anchor="ctr"/>
+          <a:bodyPr wrap="square" lIns="0" tIns="0" rIns="0" bIns="0" rtlCol="0" anchor="ctr">
+            <a:normAutofit/>
+          </a:bodyPr>
           <a:lstStyle/>
           <a:p>
             <a:pPr algn="ctr" indent="0" marL="0">
               <a:buNone/>
             </a:pPr>
             <a:r>
-              <a:rPr lang="en-US" sz="1800" i="1" dirty="0">
-                <a:solidFill>
-                  <a:srgbClr val="555555"/>
+              <a:rPr lang="en-US" sz="3600" b="1" dirty="0">
+                <a:solidFill>
+                  <a:srgbClr val="990011"/>
                 </a:solidFill>
                 <a:latin typeface="Times New Roman" pitchFamily="34" charset="0"/>
                 <a:ea typeface="Times New Roman" pitchFamily="34" charset="-122"/>
                 <a:cs typeface="Times New Roman" pitchFamily="34" charset="-120"/>
               </a:rPr>
-              <a:t>Illustration: a transport network</a:t>
-            </a:r>
-            <a:endParaRPr lang="en-US" sz="1800" dirty="0"/>
+              <a:t>2. Recent Developments in Road and Rail Transport</a:t>
+            </a:r>
+            <a:endParaRPr lang="en-US" sz="3600" dirty="0"/>
+          </a:p>
+        </p:txBody>
+      </p:sp>
+      <p:sp>
+        <p:nvSpPr>
+          <p:cNvPr id="5" name="Text 2"/>
+          <p:cNvSpPr/>
+          <p:nvPr/>
+        </p:nvSpPr>
+        <p:spPr>
+          <a:xfrm>
+            <a:off x="4069080" y="1783080"/>
+            <a:ext cx="7802575" cy="4663440"/>
+          </a:xfrm>
+          <a:prstGeom prst="rect">
+            <a:avLst/>
+          </a:prstGeom>
+          <a:noFill/>
+          <a:ln/>
+        </p:spPr>
+        <p:txBody>
+          <a:bodyPr wrap="square" lIns="0" tIns="0" rIns="0" bIns="0" rtlCol="0" anchor="t"/>
+          <a:lstStyle/>
+          <a:p>
+            <a:pPr algn="l" indent="0" marL="0">
+              <a:spcAft>
+                <a:spcPts val="800"/>
+              </a:spcAft>
+              <a:buNone/>
+            </a:pPr>
+            <a:r>
+              <a:rPr lang="en-US" sz="4000" i="1" dirty="0">
+                <a:solidFill>
+                  <a:srgbClr val="111111"/>
+                </a:solidFill>
+                <a:latin typeface="Times New Roman" pitchFamily="34" charset="0"/>
+                <a:ea typeface="Times New Roman" pitchFamily="34" charset="-122"/>
+                <a:cs typeface="Times New Roman" pitchFamily="34" charset="-120"/>
+              </a:rPr>
+              <a:t>Recent developments include the following:</a:t>
+            </a:r>
+            <a:endParaRPr lang="en-US" sz="4000" dirty="0"/>
+          </a:p>
+          <a:p>
+            <a:pPr algn="l" indent="0" marL="0">
+              <a:spcAft>
+                <a:spcPts val="800"/>
+              </a:spcAft>
+              <a:buNone/>
+            </a:pPr>
+            <a:r>
+              <a:rPr lang="en-US" sz="4000" b="1" dirty="0">
+                <a:solidFill>
+                  <a:srgbClr val="111111"/>
+                </a:solidFill>
+                <a:latin typeface="Times New Roman" pitchFamily="34" charset="0"/>
+                <a:ea typeface="Times New Roman" pitchFamily="34" charset="-122"/>
+                <a:cs typeface="Times New Roman" pitchFamily="34" charset="-120"/>
+              </a:rPr>
+              <a:t>Motorways and flyovers: </a:t>
+            </a:r>
+            <a:pPr algn="l" indent="0" marL="0">
+              <a:spcAft>
+                <a:spcPts val="800"/>
+              </a:spcAft>
+              <a:buNone/>
+            </a:pPr>
+            <a:r>
+              <a:rPr lang="en-US" sz="4000" dirty="0">
+                <a:solidFill>
+                  <a:srgbClr val="111111"/>
+                </a:solidFill>
+                <a:latin typeface="Times New Roman" pitchFamily="34" charset="0"/>
+                <a:ea typeface="Times New Roman" pitchFamily="34" charset="-122"/>
+                <a:cs typeface="Times New Roman" pitchFamily="34" charset="-120"/>
+              </a:rPr>
+              <a:t>Wide roads and bridges over roads make traffic faster.</a:t>
+            </a:r>
+            <a:endParaRPr lang="en-US" sz="4000" dirty="0"/>
+          </a:p>
+          <a:p>
+            <a:pPr algn="l" indent="0" marL="0">
+              <a:spcAft>
+                <a:spcPts val="800"/>
+              </a:spcAft>
+              <a:buNone/>
+            </a:pPr>
+            <a:r>
+              <a:rPr lang="en-US" sz="4000" b="1" dirty="0">
+                <a:solidFill>
+                  <a:srgbClr val="111111"/>
+                </a:solidFill>
+                <a:latin typeface="Times New Roman" pitchFamily="34" charset="0"/>
+                <a:ea typeface="Times New Roman" pitchFamily="34" charset="-122"/>
+                <a:cs typeface="Times New Roman" pitchFamily="34" charset="-120"/>
+              </a:rPr>
+              <a:t>Viaducts: </a:t>
+            </a:r>
+            <a:pPr algn="l" indent="0" marL="0">
+              <a:spcAft>
+                <a:spcPts val="800"/>
+              </a:spcAft>
+              <a:buNone/>
+            </a:pPr>
+            <a:r>
+              <a:rPr lang="en-US" sz="4000" dirty="0">
+                <a:solidFill>
+                  <a:srgbClr val="111111"/>
+                </a:solidFill>
+                <a:latin typeface="Times New Roman" pitchFamily="34" charset="0"/>
+                <a:ea typeface="Times New Roman" pitchFamily="34" charset="-122"/>
+                <a:cs typeface="Times New Roman" pitchFamily="34" charset="-120"/>
+              </a:rPr>
+              <a:t>Long bridges carry roads and railways over valleys.</a:t>
+            </a:r>
+            <a:endParaRPr lang="en-US" sz="4000" dirty="0"/>
           </a:p>
         </p:txBody>
       </p:sp>
@@ -14988,7 +15327,7 @@
                 <a:ea typeface="Calibri" pitchFamily="34" charset="-122"/>
                 <a:cs typeface="Calibri" pitchFamily="34" charset="-120"/>
               </a:rPr>
-              <a:t>FORMATIVE EVALUATION</a:t>
+              <a:t>BOARD SUMMARY</a:t>
             </a:r>
             <a:endParaRPr lang="en-US" sz="1400" dirty="0"/>
           </a:p>
@@ -15011,7 +15350,7 @@
         <p:spPr>
           <a:xfrm>
             <a:off x="0" y="658368"/>
-            <a:ext cx="5120640" cy="5833872"/>
+            <a:ext cx="3840480" cy="5833872"/>
           </a:xfrm>
           <a:prstGeom prst="rect">
             <a:avLst/>
@@ -15026,8 +15365,8 @@
         </p:nvSpPr>
         <p:spPr>
           <a:xfrm>
-            <a:off x="5349240" y="1005840"/>
-            <a:ext cx="6522415" cy="731520"/>
+            <a:off x="4069080" y="1005840"/>
+            <a:ext cx="7802575" cy="731520"/>
           </a:xfrm>
           <a:prstGeom prst="rect">
             <a:avLst/>
@@ -15053,7 +15392,7 @@
                 <a:ea typeface="Times New Roman" pitchFamily="34" charset="-122"/>
                 <a:cs typeface="Times New Roman" pitchFamily="34" charset="-120"/>
               </a:rPr>
-              <a:t>Evaluation 1</a:t>
+              <a:t>2. Recent Developments in Road and Rail Transport (continued)</a:t>
             </a:r>
             <a:endParaRPr lang="en-US" sz="3600" dirty="0"/>
           </a:p>
@@ -15067,8 +15406,8 @@
         </p:nvSpPr>
         <p:spPr>
           <a:xfrm>
-            <a:off x="5349240" y="1783080"/>
-            <a:ext cx="6522415" cy="4663440"/>
+            <a:off x="4069080" y="1783080"/>
+            <a:ext cx="7802575" cy="4663440"/>
           </a:xfrm>
           <a:prstGeom prst="rect">
             <a:avLst/>
@@ -15087,7 +15426,7 @@
               <a:buNone/>
             </a:pPr>
             <a:r>
-              <a:rPr lang="en-US" sz="4000" dirty="0">
+              <a:rPr lang="en-US" sz="4000" b="1" dirty="0">
                 <a:solidFill>
                   <a:srgbClr val="111111"/>
                 </a:solidFill>
@@ -15095,7 +15434,61 @@
                 <a:ea typeface="Times New Roman" pitchFamily="34" charset="-122"/>
                 <a:cs typeface="Times New Roman" pitchFamily="34" charset="-120"/>
               </a:rPr>
-              <a:t>Give two positive effects of transport on the economy.</a:t>
+              <a:t>Electric and autonomous vehicles: </a:t>
+            </a:r>
+            <a:pPr algn="l" indent="0" marL="0">
+              <a:spcAft>
+                <a:spcPts val="800"/>
+              </a:spcAft>
+              <a:buNone/>
+            </a:pPr>
+            <a:r>
+              <a:rPr lang="en-US" sz="4000" dirty="0">
+                <a:solidFill>
+                  <a:srgbClr val="111111"/>
+                </a:solidFill>
+                <a:latin typeface="Times New Roman" pitchFamily="34" charset="0"/>
+                <a:ea typeface="Times New Roman" pitchFamily="34" charset="-122"/>
+                <a:cs typeface="Times New Roman" pitchFamily="34" charset="-120"/>
+              </a:rPr>
+              <a:t>New cars run on electricity or drive themselves.</a:t>
+            </a:r>
+            <a:endParaRPr lang="en-US" sz="4000" dirty="0"/>
+          </a:p>
+          <a:p>
+            <a:pPr algn="l" indent="0" marL="0">
+              <a:spcAft>
+                <a:spcPts val="800"/>
+              </a:spcAft>
+              <a:buNone/>
+            </a:pPr>
+            <a:r>
+              <a:rPr lang="en-US" sz="4000" b="1" dirty="0">
+                <a:solidFill>
+                  <a:srgbClr val="111111"/>
+                </a:solidFill>
+                <a:latin typeface="Times New Roman" pitchFamily="34" charset="0"/>
+                <a:ea typeface="Times New Roman" pitchFamily="34" charset="-122"/>
+                <a:cs typeface="Times New Roman" pitchFamily="34" charset="-120"/>
+              </a:rPr>
+              <a:t>Tramways and high-speed trains: </a:t>
+            </a:r>
+            <a:pPr algn="l" indent="0" marL="0">
+              <a:spcAft>
+                <a:spcPts val="800"/>
+              </a:spcAft>
+              <a:buNone/>
+            </a:pPr>
+            <a:r>
+              <a:rPr lang="en-US" sz="4000" dirty="0">
+                <a:solidFill>
+                  <a:srgbClr val="111111"/>
+                </a:solidFill>
+                <a:latin typeface="Times New Roman" pitchFamily="34" charset="0"/>
+                <a:ea typeface="Times New Roman" pitchFamily="34" charset="-122"/>
+                <a:cs typeface="Times New Roman" pitchFamily="34" charset="-120"/>
+              </a:rPr>
+              <a:t>They carry many passengers quickly in and between towns.</a:t>
             </a:r>
             <a:endParaRPr lang="en-US" sz="4000" dirty="0"/>
           </a:p>
@@ -15207,15 +15600,54 @@
                 <a:ea typeface="Calibri" pitchFamily="34" charset="-122"/>
                 <a:cs typeface="Calibri" pitchFamily="34" charset="-120"/>
               </a:rPr>
-              <a:t>FORMATIVE EVALUATION</a:t>
+              <a:t>BOARD SUMMARY</a:t>
             </a:r>
             <a:endParaRPr lang="en-US" sz="1400" dirty="0"/>
+          </a:p>
+        </p:txBody>
+      </p:sp>
+      <p:sp>
+        <p:nvSpPr>
+          <p:cNvPr id="3" name="Text 1"/>
+          <p:cNvSpPr/>
+          <p:nvPr/>
+        </p:nvSpPr>
+        <p:spPr>
+          <a:xfrm>
+            <a:off x="457200" y="1005840"/>
+            <a:ext cx="11277295" cy="731520"/>
+          </a:xfrm>
+          <a:prstGeom prst="rect">
+            <a:avLst/>
+          </a:prstGeom>
+          <a:noFill/>
+          <a:ln/>
+        </p:spPr>
+        <p:txBody>
+          <a:bodyPr wrap="square" lIns="0" tIns="0" rIns="0" bIns="0" rtlCol="0" anchor="ctr"/>
+          <a:lstStyle/>
+          <a:p>
+            <a:pPr algn="ctr" indent="0" marL="0">
+              <a:buNone/>
+            </a:pPr>
+            <a:r>
+              <a:rPr lang="en-US" sz="3600" b="1" dirty="0">
+                <a:solidFill>
+                  <a:srgbClr val="990011"/>
+                </a:solidFill>
+                <a:latin typeface="Times New Roman" pitchFamily="34" charset="0"/>
+                <a:ea typeface="Times New Roman" pitchFamily="34" charset="-122"/>
+                <a:cs typeface="Times New Roman" pitchFamily="34" charset="-120"/>
+              </a:rPr>
+              <a:t>2. Recent Developments in Road and Rail Transport</a:t>
+            </a:r>
+            <a:endParaRPr lang="en-US" sz="3600" dirty="0"/>
           </a:p>
         </p:txBody>
       </p:sp>
       <p:pic>
         <p:nvPicPr>
-          <p:cNvPr id="3" name="Image 0" descr="/home/claude/f4/img/minesec_sheet.png">    </p:cNvPr>
+          <p:cNvPr id="4" name="Image 0" descr="/home/claude/f4/img/v2/network_terms_big.png">    </p:cNvPr>
           <p:cNvPicPr>
             <a:picLocks noChangeAspect="1"/>
           </p:cNvPicPr>
@@ -15229,8 +15661,8 @@
         </p:blipFill>
         <p:spPr>
           <a:xfrm>
-            <a:off x="0" y="658368"/>
-            <a:ext cx="5120640" cy="5833872"/>
+            <a:off x="629930" y="1783080"/>
+            <a:ext cx="10931835" cy="4270248"/>
           </a:xfrm>
           <a:prstGeom prst="rect">
             <a:avLst/>
@@ -15239,14 +15671,14 @@
       </p:pic>
       <p:sp>
         <p:nvSpPr>
-          <p:cNvPr id="4" name="Text 1"/>
+          <p:cNvPr id="5" name="Text 2"/>
           <p:cNvSpPr/>
           <p:nvPr/>
         </p:nvSpPr>
         <p:spPr>
           <a:xfrm>
-            <a:off x="5349240" y="1005840"/>
-            <a:ext cx="6522415" cy="731520"/>
+            <a:off x="457200" y="6089904"/>
+            <a:ext cx="11277295" cy="347472"/>
           </a:xfrm>
           <a:prstGeom prst="rect">
             <a:avLst/>
@@ -15255,68 +15687,24 @@
           <a:ln/>
         </p:spPr>
         <p:txBody>
-          <a:bodyPr wrap="square" lIns="0" tIns="0" rIns="0" bIns="0" rtlCol="0" anchor="ctr">
-            <a:normAutofit/>
-          </a:bodyPr>
+          <a:bodyPr wrap="square" lIns="0" tIns="0" rIns="0" bIns="0" rtlCol="0" anchor="ctr"/>
           <a:lstStyle/>
           <a:p>
             <a:pPr algn="ctr" indent="0" marL="0">
               <a:buNone/>
             </a:pPr>
             <a:r>
-              <a:rPr lang="en-US" sz="3600" b="1" dirty="0">
-                <a:solidFill>
-                  <a:srgbClr val="990011"/>
+              <a:rPr lang="en-US" sz="1800" i="1" dirty="0">
+                <a:solidFill>
+                  <a:srgbClr val="555555"/>
                 </a:solidFill>
                 <a:latin typeface="Times New Roman" pitchFamily="34" charset="0"/>
                 <a:ea typeface="Times New Roman" pitchFamily="34" charset="-122"/>
                 <a:cs typeface="Times New Roman" pitchFamily="34" charset="-120"/>
               </a:rPr>
-              <a:t>Expected Answer</a:t>
-            </a:r>
-            <a:endParaRPr lang="en-US" sz="3600" dirty="0"/>
-          </a:p>
-        </p:txBody>
-      </p:sp>
-      <p:sp>
-        <p:nvSpPr>
-          <p:cNvPr id="5" name="Text 2"/>
-          <p:cNvSpPr/>
-          <p:nvPr/>
-        </p:nvSpPr>
-        <p:spPr>
-          <a:xfrm>
-            <a:off x="5349240" y="1783080"/>
-            <a:ext cx="6522415" cy="4663440"/>
-          </a:xfrm>
-          <a:prstGeom prst="rect">
-            <a:avLst/>
-          </a:prstGeom>
-          <a:noFill/>
-          <a:ln/>
-        </p:spPr>
-        <p:txBody>
-          <a:bodyPr wrap="square" lIns="0" tIns="0" rIns="0" bIns="0" rtlCol="0" anchor="t"/>
-          <a:lstStyle/>
-          <a:p>
-            <a:pPr algn="l" indent="0" marL="0">
-              <a:spcAft>
-                <a:spcPts val="800"/>
-              </a:spcAft>
-              <a:buNone/>
-            </a:pPr>
-            <a:r>
-              <a:rPr lang="en-US" sz="4000" dirty="0">
-                <a:solidFill>
-                  <a:srgbClr val="111111"/>
-                </a:solidFill>
-                <a:latin typeface="Times New Roman" pitchFamily="34" charset="0"/>
-                <a:ea typeface="Times New Roman" pitchFamily="34" charset="-122"/>
-                <a:cs typeface="Times New Roman" pitchFamily="34" charset="-120"/>
-              </a:rPr>
-              <a:t>It makes trade easier and creates jobs.</a:t>
-            </a:r>
-            <a:endParaRPr lang="en-US" sz="4000" dirty="0"/>
+              <a:t>Illustration: a transport network</a:t>
+            </a:r>
+            <a:endParaRPr lang="en-US" sz="1800" dirty="0"/>
           </a:p>
         </p:txBody>
       </p:sp>
@@ -15491,7 +15879,7 @@
                 <a:ea typeface="Times New Roman" pitchFamily="34" charset="-122"/>
                 <a:cs typeface="Times New Roman" pitchFamily="34" charset="-120"/>
               </a:rPr>
-              <a:t>Evaluation 2</a:t>
+              <a:t>Evaluation 1</a:t>
             </a:r>
             <a:endParaRPr lang="en-US" sz="3600" dirty="0"/>
           </a:p>
@@ -15533,7 +15921,7 @@
                 <a:ea typeface="Times New Roman" pitchFamily="34" charset="-122"/>
                 <a:cs typeface="Times New Roman" pitchFamily="34" charset="-120"/>
               </a:rPr>
-              <a:t>Name two recent developments in road or rail transport.</a:t>
+              <a:t>Give two positive effects of transport on the economy.</a:t>
             </a:r>
             <a:endParaRPr lang="en-US" sz="4000" dirty="0"/>
           </a:p>
@@ -15752,7 +16140,7 @@
                 <a:ea typeface="Times New Roman" pitchFamily="34" charset="-122"/>
                 <a:cs typeface="Times New Roman" pitchFamily="34" charset="-120"/>
               </a:rPr>
-              <a:t>Electric cars and tramways.</a:t>
+              <a:t>It makes trade easier and creates jobs.</a:t>
             </a:r>
             <a:endParaRPr lang="en-US" sz="4000" dirty="0"/>
           </a:p>
@@ -15864,7 +16252,7 @@
                 <a:ea typeface="Calibri" pitchFamily="34" charset="-122"/>
                 <a:cs typeface="Calibri" pitchFamily="34" charset="-120"/>
               </a:rPr>
-              <a:t>REMEDIATION</a:t>
+              <a:t>FORMATIVE EVALUATION</a:t>
             </a:r>
             <a:endParaRPr lang="en-US" sz="1400" dirty="0"/>
           </a:p>
@@ -15887,7 +16275,7 @@
         <p:spPr>
           <a:xfrm>
             <a:off x="0" y="658368"/>
-            <a:ext cx="1463040" cy="5833872"/>
+            <a:ext cx="5120640" cy="5833872"/>
           </a:xfrm>
           <a:prstGeom prst="rect">
             <a:avLst/>
@@ -15902,8 +16290,8 @@
         </p:nvSpPr>
         <p:spPr>
           <a:xfrm>
-            <a:off x="1691640" y="1005840"/>
-            <a:ext cx="10180015" cy="731520"/>
+            <a:off x="5349240" y="1005840"/>
+            <a:ext cx="6522415" cy="731520"/>
           </a:xfrm>
           <a:prstGeom prst="rect">
             <a:avLst/>
@@ -15929,7 +16317,7 @@
                 <a:ea typeface="Times New Roman" pitchFamily="34" charset="-122"/>
                 <a:cs typeface="Times New Roman" pitchFamily="34" charset="-120"/>
               </a:rPr>
-              <a:t>Remediation</a:t>
+              <a:t>Evaluation 2</a:t>
             </a:r>
             <a:endParaRPr lang="en-US" sz="3600" dirty="0"/>
           </a:p>
@@ -15943,8 +16331,8 @@
         </p:nvSpPr>
         <p:spPr>
           <a:xfrm>
-            <a:off x="1691640" y="1783080"/>
-            <a:ext cx="10180015" cy="4663440"/>
+            <a:off x="5349240" y="1783080"/>
+            <a:ext cx="6522415" cy="4663440"/>
           </a:xfrm>
           <a:prstGeom prst="rect">
             <a:avLst/>
@@ -15963,7 +16351,7 @@
               <a:buNone/>
             </a:pPr>
             <a:r>
-              <a:rPr lang="en-US" sz="4000" b="1" dirty="0">
+              <a:rPr lang="en-US" sz="4000" dirty="0">
                 <a:solidFill>
                   <a:srgbClr val="111111"/>
                 </a:solidFill>
@@ -15971,73 +16359,7 @@
                 <a:ea typeface="Times New Roman" pitchFamily="34" charset="-122"/>
                 <a:cs typeface="Times New Roman" pitchFamily="34" charset="-120"/>
               </a:rPr>
-              <a:t>Fill in the blanks:</a:t>
-            </a:r>
-            <a:endParaRPr lang="en-US" sz="4000" dirty="0"/>
-          </a:p>
-          <a:p>
-            <a:pPr algn="l" marL="342900" indent="-342900">
-              <a:spcAft>
-                <a:spcPts val="800"/>
-              </a:spcAft>
-              <a:buSzPct val="100000"/>
-              <a:buFont typeface="+mj-lt"/>
-              <a:buAutoNum type="arabicPeriod" startAt="1"/>
-            </a:pPr>
-            <a:r>
-              <a:rPr lang="en-US" sz="4000" dirty="0">
-                <a:solidFill>
-                  <a:srgbClr val="111111"/>
-                </a:solidFill>
-                <a:latin typeface="Times New Roman" pitchFamily="34" charset="0"/>
-                <a:ea typeface="Times New Roman" pitchFamily="34" charset="-122"/>
-                <a:cs typeface="Times New Roman" pitchFamily="34" charset="-120"/>
-              </a:rPr>
-              <a:t>A bridge over another road is a ______.</a:t>
-            </a:r>
-            <a:endParaRPr lang="en-US" sz="4000" dirty="0"/>
-          </a:p>
-          <a:p>
-            <a:pPr algn="l" marL="342900" indent="-342900">
-              <a:spcAft>
-                <a:spcPts val="800"/>
-              </a:spcAft>
-              <a:buSzPct val="100000"/>
-              <a:buFont typeface="+mj-lt"/>
-              <a:buAutoNum type="arabicPeriod" startAt="1"/>
-            </a:pPr>
-            <a:r>
-              <a:rPr lang="en-US" sz="4000" dirty="0">
-                <a:solidFill>
-                  <a:srgbClr val="111111"/>
-                </a:solidFill>
-                <a:latin typeface="Times New Roman" pitchFamily="34" charset="0"/>
-                <a:ea typeface="Times New Roman" pitchFamily="34" charset="-122"/>
-                <a:cs typeface="Times New Roman" pitchFamily="34" charset="-120"/>
-              </a:rPr>
-              <a:t>A long bridge over a valley is a ______.</a:t>
-            </a:r>
-            <a:endParaRPr lang="en-US" sz="4000" dirty="0"/>
-          </a:p>
-          <a:p>
-            <a:pPr algn="l" marL="342900" indent="-342900">
-              <a:spcAft>
-                <a:spcPts val="800"/>
-              </a:spcAft>
-              <a:buSzPct val="100000"/>
-              <a:buFont typeface="+mj-lt"/>
-              <a:buAutoNum type="arabicPeriod" startAt="1"/>
-            </a:pPr>
-            <a:r>
-              <a:rPr lang="en-US" sz="4000" dirty="0">
-                <a:solidFill>
-                  <a:srgbClr val="111111"/>
-                </a:solidFill>
-                <a:latin typeface="Times New Roman" pitchFamily="34" charset="0"/>
-                <a:ea typeface="Times New Roman" pitchFamily="34" charset="-122"/>
-                <a:cs typeface="Times New Roman" pitchFamily="34" charset="-120"/>
-              </a:rPr>
-              <a:t>Cars that drive themselves are ______ vehicles.</a:t>
+              <a:t>Name two recent developments in road or rail transport.</a:t>
             </a:r>
             <a:endParaRPr lang="en-US" sz="4000" dirty="0"/>
           </a:p>
@@ -16149,7 +16471,7 @@
                 <a:ea typeface="Calibri" pitchFamily="34" charset="-122"/>
                 <a:cs typeface="Calibri" pitchFamily="34" charset="-120"/>
               </a:rPr>
-              <a:t>HOMEWORK</a:t>
+              <a:t>FORMATIVE EVALUATION</a:t>
             </a:r>
             <a:endParaRPr lang="en-US" sz="1400" dirty="0"/>
           </a:p>
@@ -16214,7 +16536,7 @@
                 <a:ea typeface="Times New Roman" pitchFamily="34" charset="-122"/>
                 <a:cs typeface="Times New Roman" pitchFamily="34" charset="-120"/>
               </a:rPr>
-              <a:t>Homework</a:t>
+              <a:t>Expected Answer</a:t>
             </a:r>
             <a:endParaRPr lang="en-US" sz="3600" dirty="0"/>
           </a:p>
@@ -16256,7 +16578,7 @@
                 <a:ea typeface="Times New Roman" pitchFamily="34" charset="-122"/>
                 <a:cs typeface="Times New Roman" pitchFamily="34" charset="-120"/>
               </a:rPr>
-              <a:t>Explain how the tarring of a road in your region changed the life of the people.</a:t>
+              <a:t>Electric cars and tramways.</a:t>
             </a:r>
             <a:endParaRPr lang="en-US" sz="4000" dirty="0"/>
           </a:p>
@@ -16368,7 +16690,7 @@
                 <a:ea typeface="Calibri" pitchFamily="34" charset="-122"/>
                 <a:cs typeface="Calibri" pitchFamily="34" charset="-120"/>
               </a:rPr>
-              <a:t>NEXT LESSON</a:t>
+              <a:t>REMEDIATION</a:t>
             </a:r>
             <a:endParaRPr lang="en-US" sz="1400" dirty="0"/>
           </a:p>
@@ -16391,7 +16713,7 @@
         <p:spPr>
           <a:xfrm>
             <a:off x="0" y="658368"/>
-            <a:ext cx="5120640" cy="5833872"/>
+            <a:ext cx="1463040" cy="5833872"/>
           </a:xfrm>
           <a:prstGeom prst="rect">
             <a:avLst/>
@@ -16406,8 +16728,8 @@
         </p:nvSpPr>
         <p:spPr>
           <a:xfrm>
-            <a:off x="5349240" y="1005840"/>
-            <a:ext cx="6522415" cy="731520"/>
+            <a:off x="1691640" y="1005840"/>
+            <a:ext cx="10180015" cy="731520"/>
           </a:xfrm>
           <a:prstGeom prst="rect">
             <a:avLst/>
@@ -16433,7 +16755,7 @@
                 <a:ea typeface="Times New Roman" pitchFamily="34" charset="-122"/>
                 <a:cs typeface="Times New Roman" pitchFamily="34" charset="-120"/>
               </a:rPr>
-              <a:t>Next Lesson</a:t>
+              <a:t>Remediation</a:t>
             </a:r>
             <a:endParaRPr lang="en-US" sz="3600" dirty="0"/>
           </a:p>
@@ -16447,8 +16769,8 @@
         </p:nvSpPr>
         <p:spPr>
           <a:xfrm>
-            <a:off x="5349240" y="1783080"/>
-            <a:ext cx="6522415" cy="4663440"/>
+            <a:off x="1691640" y="1783080"/>
+            <a:ext cx="10180015" cy="4663440"/>
           </a:xfrm>
           <a:prstGeom prst="rect">
             <a:avLst/>
@@ -16457,10 +16779,10 @@
           <a:ln/>
         </p:spPr>
         <p:txBody>
-          <a:bodyPr wrap="square" lIns="0" tIns="0" rIns="0" bIns="0" rtlCol="0" anchor="ctr"/>
-          <a:lstStyle/>
-          <a:p>
-            <a:pPr algn="ctr" indent="0" marL="0">
+          <a:bodyPr wrap="square" lIns="0" tIns="0" rIns="0" bIns="0" rtlCol="0" anchor="t"/>
+          <a:lstStyle/>
+          <a:p>
+            <a:pPr algn="l" indent="0" marL="0">
               <a:spcAft>
                 <a:spcPts val="800"/>
               </a:spcAft>
@@ -16475,27 +16797,73 @@
                 <a:ea typeface="Times New Roman" pitchFamily="34" charset="-122"/>
                 <a:cs typeface="Times New Roman" pitchFamily="34" charset="-120"/>
               </a:rPr>
-              <a:t>Our next lesson will be on:</a:t>
+              <a:t>Fill in the blanks:</a:t>
             </a:r>
             <a:endParaRPr lang="en-US" sz="4000" dirty="0"/>
           </a:p>
           <a:p>
-            <a:pPr algn="ctr" indent="0" marL="0">
+            <a:pPr algn="l" marL="342900" indent="-342900">
               <a:spcAft>
                 <a:spcPts val="800"/>
               </a:spcAft>
-              <a:buNone/>
+              <a:buSzPct val="100000"/>
+              <a:buFont typeface="+mj-lt"/>
+              <a:buAutoNum type="arabicPeriod" startAt="1"/>
             </a:pPr>
             <a:r>
-              <a:rPr lang="en-US" sz="4000" b="1" dirty="0">
-                <a:solidFill>
-                  <a:srgbClr val="990011"/>
+              <a:rPr lang="en-US" sz="4000" dirty="0">
+                <a:solidFill>
+                  <a:srgbClr val="111111"/>
                 </a:solidFill>
                 <a:latin typeface="Times New Roman" pitchFamily="34" charset="0"/>
                 <a:ea typeface="Times New Roman" pitchFamily="34" charset="-122"/>
                 <a:cs typeface="Times New Roman" pitchFamily="34" charset="-120"/>
               </a:rPr>
-              <a:t>Lesson 11: Air and Water Transport</a:t>
+              <a:t>A bridge over another road is a ______.</a:t>
+            </a:r>
+            <a:endParaRPr lang="en-US" sz="4000" dirty="0"/>
+          </a:p>
+          <a:p>
+            <a:pPr algn="l" marL="342900" indent="-342900">
+              <a:spcAft>
+                <a:spcPts val="800"/>
+              </a:spcAft>
+              <a:buSzPct val="100000"/>
+              <a:buFont typeface="+mj-lt"/>
+              <a:buAutoNum type="arabicPeriod" startAt="1"/>
+            </a:pPr>
+            <a:r>
+              <a:rPr lang="en-US" sz="4000" dirty="0">
+                <a:solidFill>
+                  <a:srgbClr val="111111"/>
+                </a:solidFill>
+                <a:latin typeface="Times New Roman" pitchFamily="34" charset="0"/>
+                <a:ea typeface="Times New Roman" pitchFamily="34" charset="-122"/>
+                <a:cs typeface="Times New Roman" pitchFamily="34" charset="-120"/>
+              </a:rPr>
+              <a:t>A long bridge over a valley is a ______.</a:t>
+            </a:r>
+            <a:endParaRPr lang="en-US" sz="4000" dirty="0"/>
+          </a:p>
+          <a:p>
+            <a:pPr algn="l" marL="342900" indent="-342900">
+              <a:spcAft>
+                <a:spcPts val="800"/>
+              </a:spcAft>
+              <a:buSzPct val="100000"/>
+              <a:buFont typeface="+mj-lt"/>
+              <a:buAutoNum type="arabicPeriod" startAt="1"/>
+            </a:pPr>
+            <a:r>
+              <a:rPr lang="en-US" sz="4000" dirty="0">
+                <a:solidFill>
+                  <a:srgbClr val="111111"/>
+                </a:solidFill>
+                <a:latin typeface="Times New Roman" pitchFamily="34" charset="0"/>
+                <a:ea typeface="Times New Roman" pitchFamily="34" charset="-122"/>
+                <a:cs typeface="Times New Roman" pitchFamily="34" charset="-120"/>
+              </a:rPr>
+              <a:t>Cars that drive themselves are ______ vehicles.</a:t>
             </a:r>
             <a:endParaRPr lang="en-US" sz="4000" dirty="0"/>
           </a:p>
@@ -16607,6 +16975,464 @@
                 <a:ea typeface="Calibri" pitchFamily="34" charset="-122"/>
                 <a:cs typeface="Calibri" pitchFamily="34" charset="-120"/>
               </a:rPr>
+              <a:t>HOMEWORK</a:t>
+            </a:r>
+            <a:endParaRPr lang="en-US" sz="1400" dirty="0"/>
+          </a:p>
+        </p:txBody>
+      </p:sp>
+      <p:pic>
+        <p:nvPicPr>
+          <p:cNvPr id="3" name="Image 0" descr="/home/claude/f4/img/minesec_sheet.png">    </p:cNvPr>
+          <p:cNvPicPr>
+            <a:picLocks noChangeAspect="1"/>
+          </p:cNvPicPr>
+          <p:nvPr/>
+        </p:nvPicPr>
+        <p:blipFill>
+          <a:blip r:embed="rId1"/>
+          <a:stretch>
+            <a:fillRect/>
+          </a:stretch>
+        </p:blipFill>
+        <p:spPr>
+          <a:xfrm>
+            <a:off x="0" y="658368"/>
+            <a:ext cx="5120640" cy="5833872"/>
+          </a:xfrm>
+          <a:prstGeom prst="rect">
+            <a:avLst/>
+          </a:prstGeom>
+        </p:spPr>
+      </p:pic>
+      <p:sp>
+        <p:nvSpPr>
+          <p:cNvPr id="4" name="Text 1"/>
+          <p:cNvSpPr/>
+          <p:nvPr/>
+        </p:nvSpPr>
+        <p:spPr>
+          <a:xfrm>
+            <a:off x="5349240" y="1005840"/>
+            <a:ext cx="6522415" cy="731520"/>
+          </a:xfrm>
+          <a:prstGeom prst="rect">
+            <a:avLst/>
+          </a:prstGeom>
+          <a:noFill/>
+          <a:ln/>
+        </p:spPr>
+        <p:txBody>
+          <a:bodyPr wrap="square" lIns="0" tIns="0" rIns="0" bIns="0" rtlCol="0" anchor="ctr">
+            <a:normAutofit/>
+          </a:bodyPr>
+          <a:lstStyle/>
+          <a:p>
+            <a:pPr algn="ctr" indent="0" marL="0">
+              <a:buNone/>
+            </a:pPr>
+            <a:r>
+              <a:rPr lang="en-US" sz="3600" b="1" dirty="0">
+                <a:solidFill>
+                  <a:srgbClr val="990011"/>
+                </a:solidFill>
+                <a:latin typeface="Times New Roman" pitchFamily="34" charset="0"/>
+                <a:ea typeface="Times New Roman" pitchFamily="34" charset="-122"/>
+                <a:cs typeface="Times New Roman" pitchFamily="34" charset="-120"/>
+              </a:rPr>
+              <a:t>Homework</a:t>
+            </a:r>
+            <a:endParaRPr lang="en-US" sz="3600" dirty="0"/>
+          </a:p>
+        </p:txBody>
+      </p:sp>
+      <p:sp>
+        <p:nvSpPr>
+          <p:cNvPr id="5" name="Text 2"/>
+          <p:cNvSpPr/>
+          <p:nvPr/>
+        </p:nvSpPr>
+        <p:spPr>
+          <a:xfrm>
+            <a:off x="5349240" y="1783080"/>
+            <a:ext cx="6522415" cy="4663440"/>
+          </a:xfrm>
+          <a:prstGeom prst="rect">
+            <a:avLst/>
+          </a:prstGeom>
+          <a:noFill/>
+          <a:ln/>
+        </p:spPr>
+        <p:txBody>
+          <a:bodyPr wrap="square" lIns="0" tIns="0" rIns="0" bIns="0" rtlCol="0" anchor="t"/>
+          <a:lstStyle/>
+          <a:p>
+            <a:pPr algn="l" indent="0" marL="0">
+              <a:spcAft>
+                <a:spcPts val="800"/>
+              </a:spcAft>
+              <a:buNone/>
+            </a:pPr>
+            <a:r>
+              <a:rPr lang="en-US" sz="4000" dirty="0">
+                <a:solidFill>
+                  <a:srgbClr val="111111"/>
+                </a:solidFill>
+                <a:latin typeface="Times New Roman" pitchFamily="34" charset="0"/>
+                <a:ea typeface="Times New Roman" pitchFamily="34" charset="-122"/>
+                <a:cs typeface="Times New Roman" pitchFamily="34" charset="-120"/>
+              </a:rPr>
+              <a:t>Explain how the tarring of a road in your region changed the life of the people.</a:t>
+            </a:r>
+            <a:endParaRPr lang="en-US" sz="4000" dirty="0"/>
+          </a:p>
+        </p:txBody>
+      </p:sp>
+      <p:sp>
+        <p:nvSpPr>
+          <p:cNvPr id="25" name="Slide Number Placeholder 0"/>
+          <p:cNvSpPr>
+            <a:spLocks noGrp="1"/>
+          </p:cNvSpPr>
+          <p:nvPr>
+            <p:ph type="sldNum" sz="quarter" idx="4294967295"/>
+          </p:nvPr>
+        </p:nvSpPr>
+        <p:spPr>
+          <a:xfrm>
+            <a:off x="27432" y="91440"/>
+            <a:ext cx="585216" cy="475488"/>
+          </a:xfrm>
+          <a:prstGeom prst="rect">
+            <a:avLst/>
+          </a:prstGeom>
+          <a:extLst>
+            <a:ext uri="{C572A759-6A51-4108-AA02-DFA0A04FC94B}">
+              <ma14:wrappingTextBoxFlag xmlns:ma14="http://schemas.microsoft.com/office/mac/drawingml/2011/main" val="0"/>
+            </a:ext>
+          </a:extLst>
+        </p:spPr>
+        <p:txBody>
+          <a:bodyPr/>
+          <a:lstStyle>
+            <a:lvl1pPr>
+              <a:defRPr sz="2000">
+                <a:solidFill>
+                  <a:srgbClr val="FFFFFF"/>
+                </a:solidFill>
+                <a:latin typeface="Calibri"/>
+                <a:ea typeface="Calibri"/>
+                <a:cs typeface="Calibri"/>
+              </a:defRPr>
+            </a:lvl1pPr>
+          </a:lstStyle>
+          <a:p>
+            <a:pPr algn="ctr"/>
+            <a:fld id="{F7021451-1387-4CA6-816F-3879F97B5CBC}" type="slidenum">
+              <a:rPr b="1" lang="en-US"/>
+              <a:t>47</a:t>
+            </a:fld>
+            <a:endParaRPr lang="en-US"/>
+          </a:p>
+        </p:txBody>
+      </p:sp>
+    </p:spTree>
+  </p:cSld>
+  <p:clrMapOvr>
+    <a:masterClrMapping/>
+  </p:clrMapOvr>
+</p:sld>
+</file>
+
+<file path=ppt/slides/slide48.xml><?xml version="1.0" encoding="utf-8"?>
+<p:sld xmlns:a="http://schemas.openxmlformats.org/drawingml/2006/main" xmlns:r="http://schemas.openxmlformats.org/officeDocument/2006/relationships" xmlns:p="http://schemas.openxmlformats.org/presentationml/2006/main">
+  <p:cSld name="Slide 48">
+    <p:spTree>
+      <p:nvGrpSpPr>
+        <p:cNvPr id="1" name=""/>
+        <p:cNvGrpSpPr/>
+        <p:nvPr/>
+      </p:nvGrpSpPr>
+      <p:grpSpPr>
+        <a:xfrm>
+          <a:off x="0" y="0"/>
+          <a:ext cx="0" cy="0"/>
+          <a:chOff x="0" y="0"/>
+          <a:chExt cx="0" cy="0"/>
+        </a:xfrm>
+      </p:grpSpPr>
+      <p:sp>
+        <p:nvSpPr>
+          <p:cNvPr id="2" name="Text 0"/>
+          <p:cNvSpPr/>
+          <p:nvPr/>
+        </p:nvSpPr>
+        <p:spPr>
+          <a:xfrm>
+            <a:off x="457200" y="713232"/>
+            <a:ext cx="11368735" cy="274320"/>
+          </a:xfrm>
+          <a:prstGeom prst="rect">
+            <a:avLst/>
+          </a:prstGeom>
+          <a:noFill/>
+          <a:ln/>
+        </p:spPr>
+        <p:txBody>
+          <a:bodyPr wrap="square" lIns="0" tIns="0" rIns="0" bIns="0" rtlCol="0" anchor="ctr"/>
+          <a:lstStyle/>
+          <a:p>
+            <a:pPr algn="r" indent="0" marL="0">
+              <a:buNone/>
+            </a:pPr>
+            <a:r>
+              <a:rPr lang="en-US" sz="1400" b="1" dirty="0">
+                <a:solidFill>
+                  <a:srgbClr val="1C3F6E"/>
+                </a:solidFill>
+                <a:latin typeface="Calibri" pitchFamily="34" charset="0"/>
+                <a:ea typeface="Calibri" pitchFamily="34" charset="-122"/>
+                <a:cs typeface="Calibri" pitchFamily="34" charset="-120"/>
+              </a:rPr>
+              <a:t>NEXT LESSON</a:t>
+            </a:r>
+            <a:endParaRPr lang="en-US" sz="1400" dirty="0"/>
+          </a:p>
+        </p:txBody>
+      </p:sp>
+      <p:pic>
+        <p:nvPicPr>
+          <p:cNvPr id="3" name="Image 0" descr="/home/claude/f4/img/minesec_sheet.png">    </p:cNvPr>
+          <p:cNvPicPr>
+            <a:picLocks noChangeAspect="1"/>
+          </p:cNvPicPr>
+          <p:nvPr/>
+        </p:nvPicPr>
+        <p:blipFill>
+          <a:blip r:embed="rId1"/>
+          <a:stretch>
+            <a:fillRect/>
+          </a:stretch>
+        </p:blipFill>
+        <p:spPr>
+          <a:xfrm>
+            <a:off x="0" y="658368"/>
+            <a:ext cx="5120640" cy="5833872"/>
+          </a:xfrm>
+          <a:prstGeom prst="rect">
+            <a:avLst/>
+          </a:prstGeom>
+        </p:spPr>
+      </p:pic>
+      <p:sp>
+        <p:nvSpPr>
+          <p:cNvPr id="4" name="Text 1"/>
+          <p:cNvSpPr/>
+          <p:nvPr/>
+        </p:nvSpPr>
+        <p:spPr>
+          <a:xfrm>
+            <a:off x="5349240" y="1005840"/>
+            <a:ext cx="6522415" cy="731520"/>
+          </a:xfrm>
+          <a:prstGeom prst="rect">
+            <a:avLst/>
+          </a:prstGeom>
+          <a:noFill/>
+          <a:ln/>
+        </p:spPr>
+        <p:txBody>
+          <a:bodyPr wrap="square" lIns="0" tIns="0" rIns="0" bIns="0" rtlCol="0" anchor="ctr">
+            <a:normAutofit/>
+          </a:bodyPr>
+          <a:lstStyle/>
+          <a:p>
+            <a:pPr algn="ctr" indent="0" marL="0">
+              <a:buNone/>
+            </a:pPr>
+            <a:r>
+              <a:rPr lang="en-US" sz="3600" b="1" dirty="0">
+                <a:solidFill>
+                  <a:srgbClr val="990011"/>
+                </a:solidFill>
+                <a:latin typeface="Times New Roman" pitchFamily="34" charset="0"/>
+                <a:ea typeface="Times New Roman" pitchFamily="34" charset="-122"/>
+                <a:cs typeface="Times New Roman" pitchFamily="34" charset="-120"/>
+              </a:rPr>
+              <a:t>Next Lesson</a:t>
+            </a:r>
+            <a:endParaRPr lang="en-US" sz="3600" dirty="0"/>
+          </a:p>
+        </p:txBody>
+      </p:sp>
+      <p:sp>
+        <p:nvSpPr>
+          <p:cNvPr id="5" name="Text 2"/>
+          <p:cNvSpPr/>
+          <p:nvPr/>
+        </p:nvSpPr>
+        <p:spPr>
+          <a:xfrm>
+            <a:off x="5349240" y="1783080"/>
+            <a:ext cx="6522415" cy="4663440"/>
+          </a:xfrm>
+          <a:prstGeom prst="rect">
+            <a:avLst/>
+          </a:prstGeom>
+          <a:noFill/>
+          <a:ln/>
+        </p:spPr>
+        <p:txBody>
+          <a:bodyPr wrap="square" lIns="0" tIns="0" rIns="0" bIns="0" rtlCol="0" anchor="ctr"/>
+          <a:lstStyle/>
+          <a:p>
+            <a:pPr algn="ctr" indent="0" marL="0">
+              <a:spcAft>
+                <a:spcPts val="800"/>
+              </a:spcAft>
+              <a:buNone/>
+            </a:pPr>
+            <a:r>
+              <a:rPr lang="en-US" sz="4000" b="1" dirty="0">
+                <a:solidFill>
+                  <a:srgbClr val="111111"/>
+                </a:solidFill>
+                <a:latin typeface="Times New Roman" pitchFamily="34" charset="0"/>
+                <a:ea typeface="Times New Roman" pitchFamily="34" charset="-122"/>
+                <a:cs typeface="Times New Roman" pitchFamily="34" charset="-120"/>
+              </a:rPr>
+              <a:t>Our next lesson will be on:</a:t>
+            </a:r>
+            <a:endParaRPr lang="en-US" sz="4000" dirty="0"/>
+          </a:p>
+          <a:p>
+            <a:pPr algn="ctr" indent="0" marL="0">
+              <a:spcAft>
+                <a:spcPts val="800"/>
+              </a:spcAft>
+              <a:buNone/>
+            </a:pPr>
+            <a:r>
+              <a:rPr lang="en-US" sz="4000" b="1" dirty="0">
+                <a:solidFill>
+                  <a:srgbClr val="990011"/>
+                </a:solidFill>
+                <a:latin typeface="Times New Roman" pitchFamily="34" charset="0"/>
+                <a:ea typeface="Times New Roman" pitchFamily="34" charset="-122"/>
+                <a:cs typeface="Times New Roman" pitchFamily="34" charset="-120"/>
+              </a:rPr>
+              <a:t>Lesson 11: Air and Water Transport</a:t>
+            </a:r>
+            <a:endParaRPr lang="en-US" sz="4000" dirty="0"/>
+          </a:p>
+        </p:txBody>
+      </p:sp>
+      <p:sp>
+        <p:nvSpPr>
+          <p:cNvPr id="25" name="Slide Number Placeholder 0"/>
+          <p:cNvSpPr>
+            <a:spLocks noGrp="1"/>
+          </p:cNvSpPr>
+          <p:nvPr>
+            <p:ph type="sldNum" sz="quarter" idx="4294967295"/>
+          </p:nvPr>
+        </p:nvSpPr>
+        <p:spPr>
+          <a:xfrm>
+            <a:off x="27432" y="91440"/>
+            <a:ext cx="585216" cy="475488"/>
+          </a:xfrm>
+          <a:prstGeom prst="rect">
+            <a:avLst/>
+          </a:prstGeom>
+          <a:extLst>
+            <a:ext uri="{C572A759-6A51-4108-AA02-DFA0A04FC94B}">
+              <ma14:wrappingTextBoxFlag xmlns:ma14="http://schemas.microsoft.com/office/mac/drawingml/2011/main" val="0"/>
+            </a:ext>
+          </a:extLst>
+        </p:spPr>
+        <p:txBody>
+          <a:bodyPr/>
+          <a:lstStyle>
+            <a:lvl1pPr>
+              <a:defRPr sz="2000">
+                <a:solidFill>
+                  <a:srgbClr val="FFFFFF"/>
+                </a:solidFill>
+                <a:latin typeface="Calibri"/>
+                <a:ea typeface="Calibri"/>
+                <a:cs typeface="Calibri"/>
+              </a:defRPr>
+            </a:lvl1pPr>
+          </a:lstStyle>
+          <a:p>
+            <a:pPr algn="ctr"/>
+            <a:fld id="{F7021451-1387-4CA6-816F-3879F97B5CBC}" type="slidenum">
+              <a:rPr b="1" lang="en-US"/>
+              <a:t>48</a:t>
+            </a:fld>
+            <a:endParaRPr lang="en-US"/>
+          </a:p>
+        </p:txBody>
+      </p:sp>
+    </p:spTree>
+  </p:cSld>
+  <p:clrMapOvr>
+    <a:masterClrMapping/>
+  </p:clrMapOvr>
+</p:sld>
+</file>
+
+<file path=ppt/slides/slide49.xml><?xml version="1.0" encoding="utf-8"?>
+<p:sld xmlns:a="http://schemas.openxmlformats.org/drawingml/2006/main" xmlns:r="http://schemas.openxmlformats.org/officeDocument/2006/relationships" xmlns:p="http://schemas.openxmlformats.org/presentationml/2006/main">
+  <p:cSld name="Slide 49">
+    <p:spTree>
+      <p:nvGrpSpPr>
+        <p:cNvPr id="1" name=""/>
+        <p:cNvGrpSpPr/>
+        <p:nvPr/>
+      </p:nvGrpSpPr>
+      <p:grpSpPr>
+        <a:xfrm>
+          <a:off x="0" y="0"/>
+          <a:ext cx="0" cy="0"/>
+          <a:chOff x="0" y="0"/>
+          <a:chExt cx="0" cy="0"/>
+        </a:xfrm>
+      </p:grpSpPr>
+      <p:sp>
+        <p:nvSpPr>
+          <p:cNvPr id="2" name="Text 0"/>
+          <p:cNvSpPr/>
+          <p:nvPr/>
+        </p:nvSpPr>
+        <p:spPr>
+          <a:xfrm>
+            <a:off x="457200" y="713232"/>
+            <a:ext cx="11368735" cy="274320"/>
+          </a:xfrm>
+          <a:prstGeom prst="rect">
+            <a:avLst/>
+          </a:prstGeom>
+          <a:noFill/>
+          <a:ln/>
+        </p:spPr>
+        <p:txBody>
+          <a:bodyPr wrap="square" lIns="0" tIns="0" rIns="0" bIns="0" rtlCol="0" anchor="ctr"/>
+          <a:lstStyle/>
+          <a:p>
+            <a:pPr algn="r" indent="0" marL="0">
+              <a:buNone/>
+            </a:pPr>
+            <a:r>
+              <a:rPr lang="en-US" sz="1400" b="1" dirty="0">
+                <a:solidFill>
+                  <a:srgbClr val="1C3F6E"/>
+                </a:solidFill>
+                <a:latin typeface="Calibri" pitchFamily="34" charset="0"/>
+                <a:ea typeface="Calibri" pitchFamily="34" charset="-122"/>
+                <a:cs typeface="Calibri" pitchFamily="34" charset="-120"/>
+              </a:rPr>
               <a:t>BILINGUAL GAME</a:t>
             </a:r>
             <a:endParaRPr lang="en-US" sz="1400" dirty="0"/>
@@ -16654,7 +17480,7 @@
       </p:sp>
       <p:graphicFrame>
         <p:nvGraphicFramePr>
-          <p:cNvPr id="48" name="Table 0"/>
+          <p:cNvPr id="50" name="Table 0"/>
           <p:cNvGraphicFramePr>
             <a:graphicFrameLocks noGrp="1"/>
           </p:cNvGraphicFramePr>
@@ -17690,7 +18516,7 @@
             <a:pPr algn="ctr"/>
             <a:fld id="{F7021451-1387-4CA6-816F-3879F97B5CBC}" type="slidenum">
               <a:rPr b="1" lang="en-US"/>
-              <a:t>47</a:t>
+              <a:t>49</a:t>
             </a:fld>
             <a:endParaRPr lang="en-US"/>
           </a:p>
@@ -17704,9 +18530,9 @@
 </p:sld>
 </file>
 
-<file path=ppt/slides/slide48.xml><?xml version="1.0" encoding="utf-8"?>
+<file path=ppt/slides/slide5.xml><?xml version="1.0" encoding="utf-8"?>
 <p:sld xmlns:a="http://schemas.openxmlformats.org/drawingml/2006/main" xmlns:r="http://schemas.openxmlformats.org/officeDocument/2006/relationships" xmlns:p="http://schemas.openxmlformats.org/presentationml/2006/main">
-  <p:cSld name="Slide 48">
+  <p:cSld name="Slide 5">
     <p:spTree>
       <p:nvGrpSpPr>
         <p:cNvPr id="1" name=""/>
@@ -17754,6 +18580,225 @@
                 <a:ea typeface="Calibri" pitchFamily="34" charset="-122"/>
                 <a:cs typeface="Calibri" pitchFamily="34" charset="-120"/>
               </a:rPr>
+              <a:t>HOMEWORK CORRECTION</a:t>
+            </a:r>
+            <a:endParaRPr lang="en-US" sz="1400" dirty="0"/>
+          </a:p>
+        </p:txBody>
+      </p:sp>
+      <p:pic>
+        <p:nvPicPr>
+          <p:cNvPr id="3" name="Image 0" descr="/home/claude/f4/img/minesec_sheet.png">    </p:cNvPr>
+          <p:cNvPicPr>
+            <a:picLocks noChangeAspect="1"/>
+          </p:cNvPicPr>
+          <p:nvPr/>
+        </p:nvPicPr>
+        <p:blipFill>
+          <a:blip r:embed="rId1"/>
+          <a:stretch>
+            <a:fillRect/>
+          </a:stretch>
+        </p:blipFill>
+        <p:spPr>
+          <a:xfrm>
+            <a:off x="0" y="658368"/>
+            <a:ext cx="5120640" cy="5833872"/>
+          </a:xfrm>
+          <a:prstGeom prst="rect">
+            <a:avLst/>
+          </a:prstGeom>
+        </p:spPr>
+      </p:pic>
+      <p:sp>
+        <p:nvSpPr>
+          <p:cNvPr id="4" name="Text 1"/>
+          <p:cNvSpPr/>
+          <p:nvPr/>
+        </p:nvSpPr>
+        <p:spPr>
+          <a:xfrm>
+            <a:off x="5349240" y="1005840"/>
+            <a:ext cx="6522415" cy="731520"/>
+          </a:xfrm>
+          <a:prstGeom prst="rect">
+            <a:avLst/>
+          </a:prstGeom>
+          <a:noFill/>
+          <a:ln/>
+        </p:spPr>
+        <p:txBody>
+          <a:bodyPr wrap="square" lIns="0" tIns="0" rIns="0" bIns="0" rtlCol="0" anchor="ctr">
+            <a:normAutofit/>
+          </a:bodyPr>
+          <a:lstStyle/>
+          <a:p>
+            <a:pPr algn="ctr" indent="0" marL="0">
+              <a:buNone/>
+            </a:pPr>
+            <a:r>
+              <a:rPr lang="en-US" sz="3600" b="1" dirty="0">
+                <a:solidFill>
+                  <a:srgbClr val="990011"/>
+                </a:solidFill>
+                <a:latin typeface="Times New Roman" pitchFamily="34" charset="0"/>
+                <a:ea typeface="Times New Roman" pitchFamily="34" charset="-122"/>
+                <a:cs typeface="Times New Roman" pitchFamily="34" charset="-120"/>
+              </a:rPr>
+              <a:t>Correction: Possible Answer</a:t>
+            </a:r>
+            <a:endParaRPr lang="en-US" sz="3600" dirty="0"/>
+          </a:p>
+        </p:txBody>
+      </p:sp>
+      <p:sp>
+        <p:nvSpPr>
+          <p:cNvPr id="5" name="Text 2"/>
+          <p:cNvSpPr/>
+          <p:nvPr/>
+        </p:nvSpPr>
+        <p:spPr>
+          <a:xfrm>
+            <a:off x="5349240" y="1783080"/>
+            <a:ext cx="6522415" cy="4663440"/>
+          </a:xfrm>
+          <a:prstGeom prst="rect">
+            <a:avLst/>
+          </a:prstGeom>
+          <a:noFill/>
+          <a:ln/>
+        </p:spPr>
+        <p:txBody>
+          <a:bodyPr wrap="square" lIns="0" tIns="0" rIns="0" bIns="0" rtlCol="0" anchor="t"/>
+          <a:lstStyle/>
+          <a:p>
+            <a:pPr algn="l" indent="0" marL="0">
+              <a:spcAft>
+                <a:spcPts val="800"/>
+              </a:spcAft>
+              <a:buNone/>
+            </a:pPr>
+            <a:r>
+              <a:rPr lang="en-US" sz="4000" dirty="0">
+                <a:solidFill>
+                  <a:srgbClr val="111111"/>
+                </a:solidFill>
+                <a:latin typeface="Times New Roman" pitchFamily="34" charset="0"/>
+                <a:ea typeface="Times New Roman" pitchFamily="34" charset="-122"/>
+                <a:cs typeface="Times New Roman" pitchFamily="34" charset="-120"/>
+              </a:rPr>
+              <a:t>Douala–Yaoundé–Ngaoundéré (Transcam): timber, fuel, cattle and goods for Chad; Douala–Kumba: palm oil and passengers; Douala–Nkongsamba (partly closed).</a:t>
+            </a:r>
+            <a:endParaRPr lang="en-US" sz="4000" dirty="0"/>
+          </a:p>
+        </p:txBody>
+      </p:sp>
+      <p:sp>
+        <p:nvSpPr>
+          <p:cNvPr id="25" name="Slide Number Placeholder 0"/>
+          <p:cNvSpPr>
+            <a:spLocks noGrp="1"/>
+          </p:cNvSpPr>
+          <p:nvPr>
+            <p:ph type="sldNum" sz="quarter" idx="4294967295"/>
+          </p:nvPr>
+        </p:nvSpPr>
+        <p:spPr>
+          <a:xfrm>
+            <a:off x="27432" y="91440"/>
+            <a:ext cx="585216" cy="475488"/>
+          </a:xfrm>
+          <a:prstGeom prst="rect">
+            <a:avLst/>
+          </a:prstGeom>
+          <a:extLst>
+            <a:ext uri="{C572A759-6A51-4108-AA02-DFA0A04FC94B}">
+              <ma14:wrappingTextBoxFlag xmlns:ma14="http://schemas.microsoft.com/office/mac/drawingml/2011/main" val="0"/>
+            </a:ext>
+          </a:extLst>
+        </p:spPr>
+        <p:txBody>
+          <a:bodyPr/>
+          <a:lstStyle>
+            <a:lvl1pPr>
+              <a:defRPr sz="2000">
+                <a:solidFill>
+                  <a:srgbClr val="FFFFFF"/>
+                </a:solidFill>
+                <a:latin typeface="Calibri"/>
+                <a:ea typeface="Calibri"/>
+                <a:cs typeface="Calibri"/>
+              </a:defRPr>
+            </a:lvl1pPr>
+          </a:lstStyle>
+          <a:p>
+            <a:pPr algn="ctr"/>
+            <a:fld id="{F7021451-1387-4CA6-816F-3879F97B5CBC}" type="slidenum">
+              <a:rPr b="1" lang="en-US"/>
+              <a:t>5</a:t>
+            </a:fld>
+            <a:endParaRPr lang="en-US"/>
+          </a:p>
+        </p:txBody>
+      </p:sp>
+    </p:spTree>
+  </p:cSld>
+  <p:clrMapOvr>
+    <a:masterClrMapping/>
+  </p:clrMapOvr>
+</p:sld>
+</file>
+
+<file path=ppt/slides/slide50.xml><?xml version="1.0" encoding="utf-8"?>
+<p:sld xmlns:a="http://schemas.openxmlformats.org/drawingml/2006/main" xmlns:r="http://schemas.openxmlformats.org/officeDocument/2006/relationships" xmlns:p="http://schemas.openxmlformats.org/presentationml/2006/main">
+  <p:cSld name="Slide 50">
+    <p:spTree>
+      <p:nvGrpSpPr>
+        <p:cNvPr id="1" name=""/>
+        <p:cNvGrpSpPr/>
+        <p:nvPr/>
+      </p:nvGrpSpPr>
+      <p:grpSpPr>
+        <a:xfrm>
+          <a:off x="0" y="0"/>
+          <a:ext cx="0" cy="0"/>
+          <a:chOff x="0" y="0"/>
+          <a:chExt cx="0" cy="0"/>
+        </a:xfrm>
+      </p:grpSpPr>
+      <p:sp>
+        <p:nvSpPr>
+          <p:cNvPr id="2" name="Text 0"/>
+          <p:cNvSpPr/>
+          <p:nvPr/>
+        </p:nvSpPr>
+        <p:spPr>
+          <a:xfrm>
+            <a:off x="457200" y="713232"/>
+            <a:ext cx="11368735" cy="274320"/>
+          </a:xfrm>
+          <a:prstGeom prst="rect">
+            <a:avLst/>
+          </a:prstGeom>
+          <a:noFill/>
+          <a:ln/>
+        </p:spPr>
+        <p:txBody>
+          <a:bodyPr wrap="square" lIns="0" tIns="0" rIns="0" bIns="0" rtlCol="0" anchor="ctr"/>
+          <a:lstStyle/>
+          <a:p>
+            <a:pPr algn="r" indent="0" marL="0">
+              <a:buNone/>
+            </a:pPr>
+            <a:r>
+              <a:rPr lang="en-US" sz="1400" b="1" dirty="0">
+                <a:solidFill>
+                  <a:srgbClr val="1C3F6E"/>
+                </a:solidFill>
+                <a:latin typeface="Calibri" pitchFamily="34" charset="0"/>
+                <a:ea typeface="Calibri" pitchFamily="34" charset="-122"/>
+                <a:cs typeface="Calibri" pitchFamily="34" charset="-120"/>
+              </a:rPr>
               <a:t>LOGBOOK</a:t>
             </a:r>
             <a:endParaRPr lang="en-US" sz="1400" dirty="0"/>
@@ -17801,7 +18846,7 @@
       </p:sp>
       <p:graphicFrame>
         <p:nvGraphicFramePr>
-          <p:cNvPr id="49" name="Table 0"/>
+          <p:cNvPr id="51" name="Table 0"/>
           <p:cNvGraphicFramePr>
             <a:graphicFrameLocks noGrp="1"/>
           </p:cNvGraphicFramePr>
@@ -18423,7 +19468,7 @@
             <a:pPr algn="ctr"/>
             <a:fld id="{F7021451-1387-4CA6-816F-3879F97B5CBC}" type="slidenum">
               <a:rPr b="1" lang="en-US"/>
-              <a:t>48</a:t>
+              <a:t>50</a:t>
             </a:fld>
             <a:endParaRPr lang="en-US"/>
           </a:p>
@@ -18437,9 +19482,9 @@
 </p:sld>
 </file>
 
-<file path=ppt/slides/slide49.xml><?xml version="1.0" encoding="utf-8"?>
+<file path=ppt/slides/slide51.xml><?xml version="1.0" encoding="utf-8"?>
 <p:sld xmlns:a="http://schemas.openxmlformats.org/drawingml/2006/main" xmlns:r="http://schemas.openxmlformats.org/officeDocument/2006/relationships" xmlns:p="http://schemas.openxmlformats.org/presentationml/2006/main">
-  <p:cSld name="Slide 49">
+  <p:cSld name="Slide 51">
     <p:spTree>
       <p:nvGrpSpPr>
         <p:cNvPr id="1" name=""/>
@@ -18534,7 +19579,7 @@
       </p:sp>
       <p:graphicFrame>
         <p:nvGraphicFramePr>
-          <p:cNvPr id="50" name="Table 0"/>
+          <p:cNvPr id="52" name="Table 0"/>
           <p:cNvGraphicFramePr>
             <a:graphicFrameLocks noGrp="1"/>
           </p:cNvGraphicFramePr>
@@ -18644,7 +19689,7 @@
                           <a:ea typeface="Calibri" pitchFamily="34" charset="-122"/>
                           <a:cs typeface="Calibri" pitchFamily="34" charset="-120"/>
                         </a:rPr>
-                        <a:t>Impact of Road and Rail Transport on the Economy; Recent Developments in Road and Rail Transport.</a:t>
+                        <a:t>Positive Impacts; Negative Impacts; Recent Developments in Road and Rail Transport.</a:t>
                       </a:r>
                       <a:endParaRPr lang="en-US" sz="1600" dirty="0">
                         <a:latin typeface="Calibri" charset="0"/>
@@ -19294,7 +20339,7 @@
             <a:pPr algn="ctr"/>
             <a:fld id="{F7021451-1387-4CA6-816F-3879F97B5CBC}" type="slidenum">
               <a:rPr b="1" lang="en-US"/>
-              <a:t>49</a:t>
+              <a:t>51</a:t>
             </a:fld>
             <a:endParaRPr lang="en-US"/>
           </a:p>
@@ -19308,9 +20353,9 @@
 </p:sld>
 </file>
 
-<file path=ppt/slides/slide5.xml><?xml version="1.0" encoding="utf-8"?>
+<file path=ppt/slides/slide52.xml><?xml version="1.0" encoding="utf-8"?>
 <p:sld xmlns:a="http://schemas.openxmlformats.org/drawingml/2006/main" xmlns:r="http://schemas.openxmlformats.org/officeDocument/2006/relationships" xmlns:p="http://schemas.openxmlformats.org/presentationml/2006/main">
-  <p:cSld name="Slide 5">
+  <p:cSld name="Slide 52">
     <p:spTree>
       <p:nvGrpSpPr>
         <p:cNvPr id="1" name=""/>
@@ -19358,7 +20403,7 @@
                 <a:ea typeface="Calibri" pitchFamily="34" charset="-122"/>
                 <a:cs typeface="Calibri" pitchFamily="34" charset="-120"/>
               </a:rPr>
-              <a:t>HOMEWORK CORRECTION</a:t>
+              <a:t>TEACHER'S NOTE</a:t>
             </a:r>
             <a:endParaRPr lang="en-US" sz="1400" dirty="0"/>
           </a:p>
@@ -19423,7 +20468,7 @@
                 <a:ea typeface="Times New Roman" pitchFamily="34" charset="-122"/>
                 <a:cs typeface="Times New Roman" pitchFamily="34" charset="-120"/>
               </a:rPr>
-              <a:t>Correction: Possible Answer</a:t>
+              <a:t>Teacher's Note</a:t>
             </a:r>
             <a:endParaRPr lang="en-US" sz="3600" dirty="0"/>
           </a:p>
@@ -19450,24 +20495,130 @@
           <a:bodyPr wrap="square" lIns="0" tIns="0" rIns="0" bIns="0" rtlCol="0" anchor="t"/>
           <a:lstStyle/>
           <a:p>
-            <a:pPr algn="l" indent="0" marL="0">
+            <a:pPr algn="l" marL="342900" indent="-342900">
               <a:spcAft>
                 <a:spcPts val="800"/>
               </a:spcAft>
-              <a:buNone/>
+              <a:buSzPct val="100000"/>
+              <a:buChar char="•"/>
             </a:pPr>
             <a:r>
-              <a:rPr lang="en-US" sz="4000" dirty="0">
+              <a:rPr lang="en-US" sz="2000" dirty="0">
                 <a:solidFill>
                   <a:srgbClr val="111111"/>
                 </a:solidFill>
-                <a:latin typeface="Times New Roman" pitchFamily="34" charset="0"/>
-                <a:ea typeface="Times New Roman" pitchFamily="34" charset="-122"/>
-                <a:cs typeface="Times New Roman" pitchFamily="34" charset="-120"/>
+                <a:latin typeface="Calibri" pitchFamily="34" charset="0"/>
+                <a:ea typeface="Calibri" pitchFamily="34" charset="-122"/>
+                <a:cs typeface="Calibri" pitchFamily="34" charset="-120"/>
               </a:rPr>
-              <a:t>Douala–Yaoundé–Ngaoundéré (Transcam): timber, fuel, cattle and goods for Chad; Douala–Kumba: palm oil and passengers; Douala–Nkongsamba (partly closed).</a:t>
-            </a:r>
-            <a:endParaRPr lang="en-US" sz="4000" dirty="0"/>
+              <a:t>Timing: Homework correction, plan, objectives 8 min | Recall, situation, action 10 min | 5 activities 30 min | Board summary (copying) 30 min | Evaluation, remediation 10 min | Homework, next lesson 5 min | Logbook 7 min</a:t>
+            </a:r>
+            <a:endParaRPr lang="en-US" sz="2000" dirty="0"/>
+          </a:p>
+          <a:p>
+            <a:pPr algn="l" marL="342900" indent="-342900">
+              <a:spcAft>
+                <a:spcPts val="800"/>
+              </a:spcAft>
+              <a:buSzPct val="100000"/>
+              <a:buChar char="•"/>
+            </a:pPr>
+            <a:r>
+              <a:rPr lang="en-US" sz="2000" dirty="0">
+                <a:solidFill>
+                  <a:srgbClr val="111111"/>
+                </a:solidFill>
+                <a:latin typeface="Calibri" pitchFamily="34" charset="0"/>
+                <a:ea typeface="Calibri" pitchFamily="34" charset="-122"/>
+                <a:cs typeface="Calibri" pitchFamily="34" charset="-120"/>
+              </a:rPr>
+              <a:t>Without the projector (Activity 1): discuss.</a:t>
+            </a:r>
+            <a:endParaRPr lang="en-US" sz="2000" dirty="0"/>
+          </a:p>
+          <a:p>
+            <a:pPr algn="l" marL="342900" indent="-342900">
+              <a:spcAft>
+                <a:spcPts val="800"/>
+              </a:spcAft>
+              <a:buSzPct val="100000"/>
+              <a:buChar char="•"/>
+            </a:pPr>
+            <a:r>
+              <a:rPr lang="en-US" sz="2000" dirty="0">
+                <a:solidFill>
+                  <a:srgbClr val="111111"/>
+                </a:solidFill>
+                <a:latin typeface="Calibri" pitchFamily="34" charset="0"/>
+                <a:ea typeface="Calibri" pitchFamily="34" charset="-122"/>
+                <a:cs typeface="Calibri" pitchFamily="34" charset="-120"/>
+              </a:rPr>
+              <a:t>Without the projector (Activity 2): list transport jobs.</a:t>
+            </a:r>
+            <a:endParaRPr lang="en-US" sz="2000" dirty="0"/>
+          </a:p>
+          <a:p>
+            <a:pPr algn="l" marL="342900" indent="-342900">
+              <a:spcAft>
+                <a:spcPts val="800"/>
+              </a:spcAft>
+              <a:buSzPct val="100000"/>
+              <a:buChar char="•"/>
+            </a:pPr>
+            <a:r>
+              <a:rPr lang="en-US" sz="2000" dirty="0">
+                <a:solidFill>
+                  <a:srgbClr val="111111"/>
+                </a:solidFill>
+                <a:latin typeface="Calibri" pitchFamily="34" charset="0"/>
+                <a:ea typeface="Calibri" pitchFamily="34" charset="-122"/>
+                <a:cs typeface="Calibri" pitchFamily="34" charset="-120"/>
+              </a:rPr>
+              <a:t>Without the projector (Activity 3): discuss.</a:t>
+            </a:r>
+            <a:endParaRPr lang="en-US" sz="2000" dirty="0"/>
+          </a:p>
+          <a:p>
+            <a:pPr algn="l" marL="342900" indent="-342900">
+              <a:spcAft>
+                <a:spcPts val="800"/>
+              </a:spcAft>
+              <a:buSzPct val="100000"/>
+              <a:buChar char="•"/>
+            </a:pPr>
+            <a:r>
+              <a:rPr lang="en-US" sz="2000" dirty="0">
+                <a:solidFill>
+                  <a:srgbClr val="111111"/>
+                </a:solidFill>
+                <a:latin typeface="Calibri" pitchFamily="34" charset="0"/>
+                <a:ea typeface="Calibri" pitchFamily="34" charset="-122"/>
+                <a:cs typeface="Calibri" pitchFamily="34" charset="-120"/>
+              </a:rPr>
+              <a:t>Without the projector (Activity 4): describe.</a:t>
+            </a:r>
+            <a:endParaRPr lang="en-US" sz="2000" dirty="0"/>
+          </a:p>
+          <a:p>
+            <a:pPr algn="l" marL="342900" indent="-342900">
+              <a:spcAft>
+                <a:spcPts val="800"/>
+              </a:spcAft>
+              <a:buSzPct val="100000"/>
+              <a:buChar char="•"/>
+            </a:pPr>
+            <a:r>
+              <a:rPr lang="en-US" sz="2000" dirty="0">
+                <a:solidFill>
+                  <a:srgbClr val="111111"/>
+                </a:solidFill>
+                <a:latin typeface="Calibri" pitchFamily="34" charset="0"/>
+                <a:ea typeface="Calibri" pitchFamily="34" charset="-122"/>
+                <a:cs typeface="Calibri" pitchFamily="34" charset="-120"/>
+              </a:rPr>
+              <a:t>Without the projector (Activity 5): describe.</a:t>
+            </a:r>
+            <a:endParaRPr lang="en-US" sz="2000" dirty="0"/>
           </a:p>
         </p:txBody>
       </p:sp>
@@ -19513,7 +20664,7 @@
             <a:pPr algn="ctr"/>
             <a:fld id="{F7021451-1387-4CA6-816F-3879F97B5CBC}" type="slidenum">
               <a:rPr b="1" lang="en-US"/>
-              <a:t>5</a:t>
+              <a:t>52</a:t>
             </a:fld>
             <a:endParaRPr lang="en-US"/>
           </a:p>
@@ -19527,9 +20678,9 @@
 </p:sld>
 </file>
 
-<file path=ppt/slides/slide50.xml><?xml version="1.0" encoding="utf-8"?>
+<file path=ppt/slides/slide53.xml><?xml version="1.0" encoding="utf-8"?>
 <p:sld xmlns:a="http://schemas.openxmlformats.org/drawingml/2006/main" xmlns:r="http://schemas.openxmlformats.org/officeDocument/2006/relationships" xmlns:p="http://schemas.openxmlformats.org/presentationml/2006/main">
-  <p:cSld name="Slide 50">
+  <p:cSld name="Slide 53">
     <p:spTree>
       <p:nvGrpSpPr>
         <p:cNvPr id="1" name=""/>
@@ -19577,7 +20728,7 @@
                 <a:ea typeface="Calibri" pitchFamily="34" charset="-122"/>
                 <a:cs typeface="Calibri" pitchFamily="34" charset="-120"/>
               </a:rPr>
-              <a:t>TEACHER'S NOTE</a:t>
+              <a:t>REFERENCES</a:t>
             </a:r>
             <a:endParaRPr lang="en-US" sz="1400" dirty="0"/>
           </a:p>
@@ -19600,7 +20751,7 @@
         <p:spPr>
           <a:xfrm>
             <a:off x="0" y="658368"/>
-            <a:ext cx="5120640" cy="5833872"/>
+            <a:ext cx="2468880" cy="5833872"/>
           </a:xfrm>
           <a:prstGeom prst="rect">
             <a:avLst/>
@@ -19615,8 +20766,8 @@
         </p:nvSpPr>
         <p:spPr>
           <a:xfrm>
-            <a:off x="5349240" y="1005840"/>
-            <a:ext cx="6522415" cy="731520"/>
+            <a:off x="2697480" y="1005840"/>
+            <a:ext cx="9174175" cy="731520"/>
           </a:xfrm>
           <a:prstGeom prst="rect">
             <a:avLst/>
@@ -19642,7 +20793,7 @@
                 <a:ea typeface="Times New Roman" pitchFamily="34" charset="-122"/>
                 <a:cs typeface="Times New Roman" pitchFamily="34" charset="-120"/>
               </a:rPr>
-              <a:t>Teacher's Note</a:t>
+              <a:t>References</a:t>
             </a:r>
             <a:endParaRPr lang="en-US" sz="3600" dirty="0"/>
           </a:p>
@@ -19656,8 +20807,8 @@
         </p:nvSpPr>
         <p:spPr>
           <a:xfrm>
-            <a:off x="5349240" y="1783080"/>
-            <a:ext cx="6522415" cy="4663440"/>
+            <a:off x="2697480" y="1783080"/>
+            <a:ext cx="9174175" cy="4663440"/>
           </a:xfrm>
           <a:prstGeom prst="rect">
             <a:avLst/>
@@ -19677,7 +20828,7 @@
               <a:buChar char="•"/>
             </a:pPr>
             <a:r>
-              <a:rPr lang="en-US" sz="2000" dirty="0">
+              <a:rPr lang="en-US" sz="1800" dirty="0">
                 <a:solidFill>
                   <a:srgbClr val="111111"/>
                 </a:solidFill>
@@ -19685,9 +20836,9 @@
                 <a:ea typeface="Calibri" pitchFamily="34" charset="-122"/>
                 <a:cs typeface="Calibri" pitchFamily="34" charset="-120"/>
               </a:rPr>
-              <a:t>Timing: Homework correction, plan, objectives 8 min | Recall, situation, action 10 min | 5 activities 30 min | Board summary (copying) 30 min | Evaluation, remediation 10 min | Homework, next lesson 5 min | Logbook 7 min</a:t>
-            </a:r>
-            <a:endParaRPr lang="en-US" sz="2000" dirty="0"/>
+              <a:t>Geography Syllabus, Forms I–V, MINESEC (2023) — Form 5, Module I: Management of Manufacturing and Tertiary Activities.</a:t>
+            </a:r>
+            <a:endParaRPr lang="en-US" sz="1800" dirty="0"/>
           </a:p>
           <a:p>
             <a:pPr algn="l" marL="342900" indent="-342900">
@@ -19698,7 +20849,7 @@
               <a:buChar char="•"/>
             </a:pPr>
             <a:r>
-              <a:rPr lang="en-US" sz="2000" dirty="0">
+              <a:rPr lang="en-US" sz="1800" dirty="0">
                 <a:solidFill>
                   <a:srgbClr val="111111"/>
                 </a:solidFill>
@@ -19706,9 +20857,9 @@
                 <a:ea typeface="Calibri" pitchFamily="34" charset="-122"/>
                 <a:cs typeface="Calibri" pitchFamily="34" charset="-120"/>
               </a:rPr>
-              <a:t>Without the projector (Activity 1): discuss.</a:t>
-            </a:r>
-            <a:endParaRPr lang="en-US" sz="2000" dirty="0"/>
+              <a:t>Photo, Activity 1: “Sandga Market in Douala, Cameroon” by The Advocacy Project, CC BY-NC-SA 2.0, via Flickr (https://www.flickr.com/photos/42487558@N00/3636438732)</a:t>
+            </a:r>
+            <a:endParaRPr lang="en-US" sz="1800" dirty="0"/>
           </a:p>
           <a:p>
             <a:pPr algn="l" marL="342900" indent="-342900">
@@ -19719,7 +20870,7 @@
               <a:buChar char="•"/>
             </a:pPr>
             <a:r>
-              <a:rPr lang="en-US" sz="2000" dirty="0">
+              <a:rPr lang="en-US" sz="1800" dirty="0">
                 <a:solidFill>
                   <a:srgbClr val="111111"/>
                 </a:solidFill>
@@ -19727,9 +20878,9 @@
                 <a:ea typeface="Calibri" pitchFamily="34" charset="-122"/>
                 <a:cs typeface="Calibri" pitchFamily="34" charset="-120"/>
               </a:rPr>
-              <a:t>Without the projector (Activity 2): list transport jobs.</a:t>
-            </a:r>
-            <a:endParaRPr lang="en-US" sz="2000" dirty="0"/>
+              <a:t>Photo, Activity 2: “Wadi Halfa Bus Station” by D-Stanley, CC BY 2.0, via Flickr (https://www.flickr.com/photos/79721788@N00/8651154444)</a:t>
+            </a:r>
+            <a:endParaRPr lang="en-US" sz="1800" dirty="0"/>
           </a:p>
           <a:p>
             <a:pPr algn="l" marL="342900" indent="-342900">
@@ -19740,7 +20891,7 @@
               <a:buChar char="•"/>
             </a:pPr>
             <a:r>
-              <a:rPr lang="en-US" sz="2000" dirty="0">
+              <a:rPr lang="en-US" sz="1800" dirty="0">
                 <a:solidFill>
                   <a:srgbClr val="111111"/>
                 </a:solidFill>
@@ -19748,9 +20899,9 @@
                 <a:ea typeface="Calibri" pitchFamily="34" charset="-122"/>
                 <a:cs typeface="Calibri" pitchFamily="34" charset="-120"/>
               </a:rPr>
-              <a:t>Without the projector (Activity 3): discuss.</a:t>
-            </a:r>
-            <a:endParaRPr lang="en-US" sz="2000" dirty="0"/>
+              <a:t>Photo, Activity 3: “Nairobi Traffic Jam” by rogiro, CC BY-NC 2.0, via Flickr (https://www.flickr.com/photos/43132185@N00/48712135)</a:t>
+            </a:r>
+            <a:endParaRPr lang="en-US" sz="1800" dirty="0"/>
           </a:p>
           <a:p>
             <a:pPr algn="l" marL="342900" indent="-342900">
@@ -19761,7 +20912,7 @@
               <a:buChar char="•"/>
             </a:pPr>
             <a:r>
-              <a:rPr lang="en-US" sz="2000" dirty="0">
+              <a:rPr lang="en-US" sz="1800" dirty="0">
                 <a:solidFill>
                   <a:srgbClr val="111111"/>
                 </a:solidFill>
@@ -19769,9 +20920,9 @@
                 <a:ea typeface="Calibri" pitchFamily="34" charset="-122"/>
                 <a:cs typeface="Calibri" pitchFamily="34" charset="-120"/>
               </a:rPr>
-              <a:t>Without the projector (Activity 4): describe.</a:t>
-            </a:r>
-            <a:endParaRPr lang="en-US" sz="2000" dirty="0"/>
+              <a:t>Photo, Activity 4: “'Mini Stack' Interchange of Interstate 10, Loop 202, and State Route 5” by squeaks2569, CC BY-SA 2.0, via Flickr (https://www.flickr.com/photos/38478466@N06/5180259860)</a:t>
+            </a:r>
+            <a:endParaRPr lang="en-US" sz="1800" dirty="0"/>
           </a:p>
           <a:p>
             <a:pPr algn="l" marL="342900" indent="-342900">
@@ -19782,7 +20933,7 @@
               <a:buChar char="•"/>
             </a:pPr>
             <a:r>
-              <a:rPr lang="en-US" sz="2000" dirty="0">
+              <a:rPr lang="en-US" sz="1800" dirty="0">
                 <a:solidFill>
                   <a:srgbClr val="111111"/>
                 </a:solidFill>
@@ -19790,9 +20941,30 @@
                 <a:ea typeface="Calibri" pitchFamily="34" charset="-122"/>
                 <a:cs typeface="Calibri" pitchFamily="34" charset="-120"/>
               </a:rPr>
-              <a:t>Without the projector (Activity 5): describe.</a:t>
-            </a:r>
-            <a:endParaRPr lang="en-US" sz="2000" dirty="0"/>
+              <a:t>Photo, Activity 5: “Train de nuit” by Huard, CC BY-NC-ND 2.0, via Flickr (https://www.flickr.com/photos/41569561@N07/5499545979)</a:t>
+            </a:r>
+            <a:endParaRPr lang="en-US" sz="1800" dirty="0"/>
+          </a:p>
+          <a:p>
+            <a:pPr algn="l" marL="342900" indent="-342900">
+              <a:spcAft>
+                <a:spcPts val="800"/>
+              </a:spcAft>
+              <a:buSzPct val="100000"/>
+              <a:buChar char="•"/>
+            </a:pPr>
+            <a:r>
+              <a:rPr lang="en-US" sz="1800" dirty="0">
+                <a:solidFill>
+                  <a:srgbClr val="111111"/>
+                </a:solidFill>
+                <a:latin typeface="Calibri" pitchFamily="34" charset="0"/>
+                <a:ea typeface="Calibri" pitchFamily="34" charset="-122"/>
+                <a:cs typeface="Calibri" pitchFamily="34" charset="-120"/>
+              </a:rPr>
+              <a:t>Diagrams and animations: drawn for this lesson (Geography Department).</a:t>
+            </a:r>
+            <a:endParaRPr lang="en-US" sz="1800" dirty="0"/>
           </a:p>
         </p:txBody>
       </p:sp>
@@ -19838,353 +21010,7 @@
             <a:pPr algn="ctr"/>
             <a:fld id="{F7021451-1387-4CA6-816F-3879F97B5CBC}" type="slidenum">
               <a:rPr b="1" lang="en-US"/>
-              <a:t>50</a:t>
-            </a:fld>
-            <a:endParaRPr lang="en-US"/>
-          </a:p>
-        </p:txBody>
-      </p:sp>
-    </p:spTree>
-  </p:cSld>
-  <p:clrMapOvr>
-    <a:masterClrMapping/>
-  </p:clrMapOvr>
-</p:sld>
-</file>
-
-<file path=ppt/slides/slide51.xml><?xml version="1.0" encoding="utf-8"?>
-<p:sld xmlns:a="http://schemas.openxmlformats.org/drawingml/2006/main" xmlns:r="http://schemas.openxmlformats.org/officeDocument/2006/relationships" xmlns:p="http://schemas.openxmlformats.org/presentationml/2006/main">
-  <p:cSld name="Slide 51">
-    <p:spTree>
-      <p:nvGrpSpPr>
-        <p:cNvPr id="1" name=""/>
-        <p:cNvGrpSpPr/>
-        <p:nvPr/>
-      </p:nvGrpSpPr>
-      <p:grpSpPr>
-        <a:xfrm>
-          <a:off x="0" y="0"/>
-          <a:ext cx="0" cy="0"/>
-          <a:chOff x="0" y="0"/>
-          <a:chExt cx="0" cy="0"/>
-        </a:xfrm>
-      </p:grpSpPr>
-      <p:sp>
-        <p:nvSpPr>
-          <p:cNvPr id="2" name="Text 0"/>
-          <p:cNvSpPr/>
-          <p:nvPr/>
-        </p:nvSpPr>
-        <p:spPr>
-          <a:xfrm>
-            <a:off x="457200" y="713232"/>
-            <a:ext cx="11368735" cy="274320"/>
-          </a:xfrm>
-          <a:prstGeom prst="rect">
-            <a:avLst/>
-          </a:prstGeom>
-          <a:noFill/>
-          <a:ln/>
-        </p:spPr>
-        <p:txBody>
-          <a:bodyPr wrap="square" lIns="0" tIns="0" rIns="0" bIns="0" rtlCol="0" anchor="ctr"/>
-          <a:lstStyle/>
-          <a:p>
-            <a:pPr algn="r" indent="0" marL="0">
-              <a:buNone/>
-            </a:pPr>
-            <a:r>
-              <a:rPr lang="en-US" sz="1400" b="1" dirty="0">
-                <a:solidFill>
-                  <a:srgbClr val="1C3F6E"/>
-                </a:solidFill>
-                <a:latin typeface="Calibri" pitchFamily="34" charset="0"/>
-                <a:ea typeface="Calibri" pitchFamily="34" charset="-122"/>
-                <a:cs typeface="Calibri" pitchFamily="34" charset="-120"/>
-              </a:rPr>
-              <a:t>REFERENCES</a:t>
-            </a:r>
-            <a:endParaRPr lang="en-US" sz="1400" dirty="0"/>
-          </a:p>
-        </p:txBody>
-      </p:sp>
-      <p:pic>
-        <p:nvPicPr>
-          <p:cNvPr id="3" name="Image 0" descr="/home/claude/f4/img/minesec_sheet.png">    </p:cNvPr>
-          <p:cNvPicPr>
-            <a:picLocks noChangeAspect="1"/>
-          </p:cNvPicPr>
-          <p:nvPr/>
-        </p:nvPicPr>
-        <p:blipFill>
-          <a:blip r:embed="rId1"/>
-          <a:stretch>
-            <a:fillRect/>
-          </a:stretch>
-        </p:blipFill>
-        <p:spPr>
-          <a:xfrm>
-            <a:off x="0" y="658368"/>
-            <a:ext cx="2468880" cy="5833872"/>
-          </a:xfrm>
-          <a:prstGeom prst="rect">
-            <a:avLst/>
-          </a:prstGeom>
-        </p:spPr>
-      </p:pic>
-      <p:sp>
-        <p:nvSpPr>
-          <p:cNvPr id="4" name="Text 1"/>
-          <p:cNvSpPr/>
-          <p:nvPr/>
-        </p:nvSpPr>
-        <p:spPr>
-          <a:xfrm>
-            <a:off x="2697480" y="1005840"/>
-            <a:ext cx="9174175" cy="731520"/>
-          </a:xfrm>
-          <a:prstGeom prst="rect">
-            <a:avLst/>
-          </a:prstGeom>
-          <a:noFill/>
-          <a:ln/>
-        </p:spPr>
-        <p:txBody>
-          <a:bodyPr wrap="square" lIns="0" tIns="0" rIns="0" bIns="0" rtlCol="0" anchor="ctr">
-            <a:normAutofit/>
-          </a:bodyPr>
-          <a:lstStyle/>
-          <a:p>
-            <a:pPr algn="ctr" indent="0" marL="0">
-              <a:buNone/>
-            </a:pPr>
-            <a:r>
-              <a:rPr lang="en-US" sz="3600" b="1" dirty="0">
-                <a:solidFill>
-                  <a:srgbClr val="990011"/>
-                </a:solidFill>
-                <a:latin typeface="Times New Roman" pitchFamily="34" charset="0"/>
-                <a:ea typeface="Times New Roman" pitchFamily="34" charset="-122"/>
-                <a:cs typeface="Times New Roman" pitchFamily="34" charset="-120"/>
-              </a:rPr>
-              <a:t>References</a:t>
-            </a:r>
-            <a:endParaRPr lang="en-US" sz="3600" dirty="0"/>
-          </a:p>
-        </p:txBody>
-      </p:sp>
-      <p:sp>
-        <p:nvSpPr>
-          <p:cNvPr id="5" name="Text 2"/>
-          <p:cNvSpPr/>
-          <p:nvPr/>
-        </p:nvSpPr>
-        <p:spPr>
-          <a:xfrm>
-            <a:off x="2697480" y="1783080"/>
-            <a:ext cx="9174175" cy="4663440"/>
-          </a:xfrm>
-          <a:prstGeom prst="rect">
-            <a:avLst/>
-          </a:prstGeom>
-          <a:noFill/>
-          <a:ln/>
-        </p:spPr>
-        <p:txBody>
-          <a:bodyPr wrap="square" lIns="0" tIns="0" rIns="0" bIns="0" rtlCol="0" anchor="t"/>
-          <a:lstStyle/>
-          <a:p>
-            <a:pPr algn="l" marL="342900" indent="-342900">
-              <a:spcAft>
-                <a:spcPts val="800"/>
-              </a:spcAft>
-              <a:buSzPct val="100000"/>
-              <a:buChar char="•"/>
-            </a:pPr>
-            <a:r>
-              <a:rPr lang="en-US" sz="1800" dirty="0">
-                <a:solidFill>
-                  <a:srgbClr val="111111"/>
-                </a:solidFill>
-                <a:latin typeface="Calibri" pitchFamily="34" charset="0"/>
-                <a:ea typeface="Calibri" pitchFamily="34" charset="-122"/>
-                <a:cs typeface="Calibri" pitchFamily="34" charset="-120"/>
-              </a:rPr>
-              <a:t>Geography Syllabus, Forms I–V, MINESEC (2023) — Form 5, Module I: Management of Manufacturing and Tertiary Activities.</a:t>
-            </a:r>
-            <a:endParaRPr lang="en-US" sz="1800" dirty="0"/>
-          </a:p>
-          <a:p>
-            <a:pPr algn="l" marL="342900" indent="-342900">
-              <a:spcAft>
-                <a:spcPts val="800"/>
-              </a:spcAft>
-              <a:buSzPct val="100000"/>
-              <a:buChar char="•"/>
-            </a:pPr>
-            <a:r>
-              <a:rPr lang="en-US" sz="1800" dirty="0">
-                <a:solidFill>
-                  <a:srgbClr val="111111"/>
-                </a:solidFill>
-                <a:latin typeface="Calibri" pitchFamily="34" charset="0"/>
-                <a:ea typeface="Calibri" pitchFamily="34" charset="-122"/>
-                <a:cs typeface="Calibri" pitchFamily="34" charset="-120"/>
-              </a:rPr>
-              <a:t>Photo, Activity 1: “Sandga Market in Douala, Cameroon” by The Advocacy Project, CC BY-NC-SA 2.0, via Flickr (https://www.flickr.com/photos/42487558@N00/3636438732)</a:t>
-            </a:r>
-            <a:endParaRPr lang="en-US" sz="1800" dirty="0"/>
-          </a:p>
-          <a:p>
-            <a:pPr algn="l" marL="342900" indent="-342900">
-              <a:spcAft>
-                <a:spcPts val="800"/>
-              </a:spcAft>
-              <a:buSzPct val="100000"/>
-              <a:buChar char="•"/>
-            </a:pPr>
-            <a:r>
-              <a:rPr lang="en-US" sz="1800" dirty="0">
-                <a:solidFill>
-                  <a:srgbClr val="111111"/>
-                </a:solidFill>
-                <a:latin typeface="Calibri" pitchFamily="34" charset="0"/>
-                <a:ea typeface="Calibri" pitchFamily="34" charset="-122"/>
-                <a:cs typeface="Calibri" pitchFamily="34" charset="-120"/>
-              </a:rPr>
-              <a:t>Photo, Activity 2: “Wadi Halfa Bus Station” by D-Stanley, CC BY 2.0, via Flickr (https://www.flickr.com/photos/79721788@N00/8651154444)</a:t>
-            </a:r>
-            <a:endParaRPr lang="en-US" sz="1800" dirty="0"/>
-          </a:p>
-          <a:p>
-            <a:pPr algn="l" marL="342900" indent="-342900">
-              <a:spcAft>
-                <a:spcPts val="800"/>
-              </a:spcAft>
-              <a:buSzPct val="100000"/>
-              <a:buChar char="•"/>
-            </a:pPr>
-            <a:r>
-              <a:rPr lang="en-US" sz="1800" dirty="0">
-                <a:solidFill>
-                  <a:srgbClr val="111111"/>
-                </a:solidFill>
-                <a:latin typeface="Calibri" pitchFamily="34" charset="0"/>
-                <a:ea typeface="Calibri" pitchFamily="34" charset="-122"/>
-                <a:cs typeface="Calibri" pitchFamily="34" charset="-120"/>
-              </a:rPr>
-              <a:t>Photo, Activity 3: “Nairobi Traffic Jam” by rogiro, CC BY-NC 2.0, via Flickr (https://www.flickr.com/photos/43132185@N00/48712135)</a:t>
-            </a:r>
-            <a:endParaRPr lang="en-US" sz="1800" dirty="0"/>
-          </a:p>
-          <a:p>
-            <a:pPr algn="l" marL="342900" indent="-342900">
-              <a:spcAft>
-                <a:spcPts val="800"/>
-              </a:spcAft>
-              <a:buSzPct val="100000"/>
-              <a:buChar char="•"/>
-            </a:pPr>
-            <a:r>
-              <a:rPr lang="en-US" sz="1800" dirty="0">
-                <a:solidFill>
-                  <a:srgbClr val="111111"/>
-                </a:solidFill>
-                <a:latin typeface="Calibri" pitchFamily="34" charset="0"/>
-                <a:ea typeface="Calibri" pitchFamily="34" charset="-122"/>
-                <a:cs typeface="Calibri" pitchFamily="34" charset="-120"/>
-              </a:rPr>
-              <a:t>Photo, Activity 4: “'Mini Stack' Interchange of Interstate 10, Loop 202, and State Route 5” by squeaks2569, CC BY-SA 2.0, via Flickr (https://www.flickr.com/photos/38478466@N06/5180259860)</a:t>
-            </a:r>
-            <a:endParaRPr lang="en-US" sz="1800" dirty="0"/>
-          </a:p>
-          <a:p>
-            <a:pPr algn="l" marL="342900" indent="-342900">
-              <a:spcAft>
-                <a:spcPts val="800"/>
-              </a:spcAft>
-              <a:buSzPct val="100000"/>
-              <a:buChar char="•"/>
-            </a:pPr>
-            <a:r>
-              <a:rPr lang="en-US" sz="1800" dirty="0">
-                <a:solidFill>
-                  <a:srgbClr val="111111"/>
-                </a:solidFill>
-                <a:latin typeface="Calibri" pitchFamily="34" charset="0"/>
-                <a:ea typeface="Calibri" pitchFamily="34" charset="-122"/>
-                <a:cs typeface="Calibri" pitchFamily="34" charset="-120"/>
-              </a:rPr>
-              <a:t>Photo, Activity 5: “Train de nuit” by Huard, CC BY-NC-ND 2.0, via Flickr (https://www.flickr.com/photos/41569561@N07/5499545979)</a:t>
-            </a:r>
-            <a:endParaRPr lang="en-US" sz="1800" dirty="0"/>
-          </a:p>
-          <a:p>
-            <a:pPr algn="l" marL="342900" indent="-342900">
-              <a:spcAft>
-                <a:spcPts val="800"/>
-              </a:spcAft>
-              <a:buSzPct val="100000"/>
-              <a:buChar char="•"/>
-            </a:pPr>
-            <a:r>
-              <a:rPr lang="en-US" sz="1800" dirty="0">
-                <a:solidFill>
-                  <a:srgbClr val="111111"/>
-                </a:solidFill>
-                <a:latin typeface="Calibri" pitchFamily="34" charset="0"/>
-                <a:ea typeface="Calibri" pitchFamily="34" charset="-122"/>
-                <a:cs typeface="Calibri" pitchFamily="34" charset="-120"/>
-              </a:rPr>
-              <a:t>Diagrams and animations: drawn for this lesson (Geography Department).</a:t>
-            </a:r>
-            <a:endParaRPr lang="en-US" sz="1800" dirty="0"/>
-          </a:p>
-        </p:txBody>
-      </p:sp>
-      <p:sp>
-        <p:nvSpPr>
-          <p:cNvPr id="25" name="Slide Number Placeholder 0"/>
-          <p:cNvSpPr>
-            <a:spLocks noGrp="1"/>
-          </p:cNvSpPr>
-          <p:nvPr>
-            <p:ph type="sldNum" sz="quarter" idx="4294967295"/>
-          </p:nvPr>
-        </p:nvSpPr>
-        <p:spPr>
-          <a:xfrm>
-            <a:off x="27432" y="91440"/>
-            <a:ext cx="585216" cy="475488"/>
-          </a:xfrm>
-          <a:prstGeom prst="rect">
-            <a:avLst/>
-          </a:prstGeom>
-          <a:extLst>
-            <a:ext uri="{C572A759-6A51-4108-AA02-DFA0A04FC94B}">
-              <ma14:wrappingTextBoxFlag xmlns:ma14="http://schemas.microsoft.com/office/mac/drawingml/2011/main" val="0"/>
-            </a:ext>
-          </a:extLst>
-        </p:spPr>
-        <p:txBody>
-          <a:bodyPr/>
-          <a:lstStyle>
-            <a:lvl1pPr>
-              <a:defRPr sz="2000">
-                <a:solidFill>
-                  <a:srgbClr val="FFFFFF"/>
-                </a:solidFill>
-                <a:latin typeface="Calibri"/>
-                <a:ea typeface="Calibri"/>
-                <a:cs typeface="Calibri"/>
-              </a:defRPr>
-            </a:lvl1pPr>
-          </a:lstStyle>
-          <a:p>
-            <a:pPr algn="ctr"/>
-            <a:fld id="{F7021451-1387-4CA6-816F-3879F97B5CBC}" type="slidenum">
-              <a:rPr b="1" lang="en-US"/>
-              <a:t>51</a:t>
+              <a:t>53</a:t>
             </a:fld>
             <a:endParaRPr lang="en-US"/>
           </a:p>
